--- a/SEM 6/$Mini Project/house-of-cards.pptx
+++ b/SEM 6/$Mini Project/house-of-cards.pptx
@@ -5,19 +5,22 @@
     <p:sldMasterId id="2147483648" r:id="rId1"/>
   </p:sldMasterIdLst>
   <p:notesMasterIdLst>
-    <p:notesMasterId r:id="rId12"/>
+    <p:notesMasterId r:id="rId15"/>
   </p:notesMasterIdLst>
   <p:sldIdLst>
     <p:sldId id="256" r:id="rId2"/>
     <p:sldId id="257" r:id="rId3"/>
-    <p:sldId id="258" r:id="rId4"/>
-    <p:sldId id="259" r:id="rId5"/>
-    <p:sldId id="260" r:id="rId6"/>
-    <p:sldId id="261" r:id="rId7"/>
-    <p:sldId id="262" r:id="rId8"/>
-    <p:sldId id="263" r:id="rId9"/>
-    <p:sldId id="264" r:id="rId10"/>
-    <p:sldId id="265" r:id="rId11"/>
+    <p:sldId id="268" r:id="rId4"/>
+    <p:sldId id="258" r:id="rId5"/>
+    <p:sldId id="259" r:id="rId6"/>
+    <p:sldId id="260" r:id="rId7"/>
+    <p:sldId id="261" r:id="rId8"/>
+    <p:sldId id="262" r:id="rId9"/>
+    <p:sldId id="263" r:id="rId10"/>
+    <p:sldId id="264" r:id="rId11"/>
+    <p:sldId id="265" r:id="rId12"/>
+    <p:sldId id="266" r:id="rId13"/>
+    <p:sldId id="267" r:id="rId14"/>
   </p:sldIdLst>
   <p:sldSz cx="12192000" cy="6858000"/>
   <p:notesSz cx="6858000" cy="9144000"/>
@@ -116,6 +119,11 @@
       </a:defRPr>
     </a:lvl9pPr>
   </p:defaultTextStyle>
+  <p:extLst>
+    <p:ext uri="{EFAFB233-063F-42B5-8137-9DF3F51BA10A}">
+      <p15:sldGuideLst xmlns:p15="http://schemas.microsoft.com/office/powerpoint/2012/main"/>
+    </p:ext>
+  </p:extLst>
 </p:presentation>
 </file>
 
@@ -201,7 +209,7 @@
           <a:p>
             <a:fld id="{93439FC1-AF45-4C46-B480-B9C8F990B6EB}" type="datetimeFigureOut">
               <a:rPr lang="en-IN" smtClean="0"/>
-              <a:t>08-02-2026</a:t>
+              <a:t>10-02-2026</a:t>
             </a:fld>
             <a:endParaRPr lang="en-IN"/>
           </a:p>
@@ -497,6 +505,13 @@
           </p:nvPr>
         </p:nvSpPr>
         <p:spPr/>
+        <p:txBody>
+          <a:bodyPr/>
+          <a:lstStyle/>
+          <a:p>
+            <a:endParaRPr lang="en-US"/>
+          </a:p>
+        </p:txBody>
       </p:sp>
       <p:sp>
         <p:nvSpPr>
@@ -581,6 +596,13 @@
           </p:nvPr>
         </p:nvSpPr>
         <p:spPr/>
+        <p:txBody>
+          <a:bodyPr/>
+          <a:lstStyle/>
+          <a:p>
+            <a:endParaRPr lang="en-US"/>
+          </a:p>
+        </p:txBody>
       </p:sp>
       <p:sp>
         <p:nvSpPr>
@@ -665,6 +687,13 @@
           </p:nvPr>
         </p:nvSpPr>
         <p:spPr/>
+        <p:txBody>
+          <a:bodyPr/>
+          <a:lstStyle/>
+          <a:p>
+            <a:endParaRPr lang="en-US"/>
+          </a:p>
+        </p:txBody>
       </p:sp>
       <p:sp>
         <p:nvSpPr>
@@ -702,7 +731,7 @@
           <a:p>
             <a:fld id="{4E245E13-92BE-4E76-9345-45B15031D8EC}" type="slidenum">
               <a:rPr lang="en-IN" smtClean="0"/>
-              <a:t>3</a:t>
+              <a:t>4</a:t>
             </a:fld>
             <a:endParaRPr lang="en-IN"/>
           </a:p>
@@ -749,6 +778,13 @@
           </p:nvPr>
         </p:nvSpPr>
         <p:spPr/>
+        <p:txBody>
+          <a:bodyPr/>
+          <a:lstStyle/>
+          <a:p>
+            <a:endParaRPr lang="en-US"/>
+          </a:p>
+        </p:txBody>
       </p:sp>
       <p:sp>
         <p:nvSpPr>
@@ -786,7 +822,7 @@
           <a:p>
             <a:fld id="{4E245E13-92BE-4E76-9345-45B15031D8EC}" type="slidenum">
               <a:rPr lang="en-IN" smtClean="0"/>
-              <a:t>4</a:t>
+              <a:t>5</a:t>
             </a:fld>
             <a:endParaRPr lang="en-IN"/>
           </a:p>
@@ -954,7 +990,7 @@
           <a:p>
             <a:fld id="{C4095AA1-E3F7-4466-8625-D61421E070F6}" type="datetimeFigureOut">
               <a:rPr lang="en-IN" smtClean="0"/>
-              <a:t>08-02-2026</a:t>
+              <a:t>10-02-2026</a:t>
             </a:fld>
             <a:endParaRPr lang="en-IN"/>
           </a:p>
@@ -1166,7 +1202,7 @@
           <a:p>
             <a:fld id="{C4095AA1-E3F7-4466-8625-D61421E070F6}" type="datetimeFigureOut">
               <a:rPr lang="en-IN" smtClean="0"/>
-              <a:t>08-02-2026</a:t>
+              <a:t>10-02-2026</a:t>
             </a:fld>
             <a:endParaRPr lang="en-IN"/>
           </a:p>
@@ -1388,7 +1424,7 @@
           <a:p>
             <a:fld id="{C4095AA1-E3F7-4466-8625-D61421E070F6}" type="datetimeFigureOut">
               <a:rPr lang="en-IN" smtClean="0"/>
-              <a:t>08-02-2026</a:t>
+              <a:t>10-02-2026</a:t>
             </a:fld>
             <a:endParaRPr lang="en-IN"/>
           </a:p>
@@ -1600,7 +1636,7 @@
           <a:p>
             <a:fld id="{C4095AA1-E3F7-4466-8625-D61421E070F6}" type="datetimeFigureOut">
               <a:rPr lang="en-IN" smtClean="0"/>
-              <a:t>08-02-2026</a:t>
+              <a:t>10-02-2026</a:t>
             </a:fld>
             <a:endParaRPr lang="en-IN"/>
           </a:p>
@@ -1888,7 +1924,7 @@
           <a:p>
             <a:fld id="{C4095AA1-E3F7-4466-8625-D61421E070F6}" type="datetimeFigureOut">
               <a:rPr lang="en-IN" smtClean="0"/>
-              <a:t>08-02-2026</a:t>
+              <a:t>10-02-2026</a:t>
             </a:fld>
             <a:endParaRPr lang="en-IN"/>
           </a:p>
@@ -2168,7 +2204,7 @@
           <a:p>
             <a:fld id="{C4095AA1-E3F7-4466-8625-D61421E070F6}" type="datetimeFigureOut">
               <a:rPr lang="en-IN" smtClean="0"/>
-              <a:t>08-02-2026</a:t>
+              <a:t>10-02-2026</a:t>
             </a:fld>
             <a:endParaRPr lang="en-IN"/>
           </a:p>
@@ -2595,7 +2631,7 @@
           <a:p>
             <a:fld id="{C4095AA1-E3F7-4466-8625-D61421E070F6}" type="datetimeFigureOut">
               <a:rPr lang="en-IN" smtClean="0"/>
-              <a:t>08-02-2026</a:t>
+              <a:t>10-02-2026</a:t>
             </a:fld>
             <a:endParaRPr lang="en-IN"/>
           </a:p>
@@ -2749,7 +2785,7 @@
           <a:p>
             <a:fld id="{C4095AA1-E3F7-4466-8625-D61421E070F6}" type="datetimeFigureOut">
               <a:rPr lang="en-IN" smtClean="0"/>
-              <a:t>08-02-2026</a:t>
+              <a:t>10-02-2026</a:t>
             </a:fld>
             <a:endParaRPr lang="en-IN"/>
           </a:p>
@@ -2874,7 +2910,7 @@
           <a:p>
             <a:fld id="{C4095AA1-E3F7-4466-8625-D61421E070F6}" type="datetimeFigureOut">
               <a:rPr lang="en-IN" smtClean="0"/>
-              <a:t>08-02-2026</a:t>
+              <a:t>10-02-2026</a:t>
             </a:fld>
             <a:endParaRPr lang="en-IN"/>
           </a:p>
@@ -3199,7 +3235,7 @@
           <a:p>
             <a:fld id="{C4095AA1-E3F7-4466-8625-D61421E070F6}" type="datetimeFigureOut">
               <a:rPr lang="en-IN" smtClean="0"/>
-              <a:t>08-02-2026</a:t>
+              <a:t>10-02-2026</a:t>
             </a:fld>
             <a:endParaRPr lang="en-IN"/>
           </a:p>
@@ -3500,7 +3536,7 @@
           <a:p>
             <a:fld id="{C4095AA1-E3F7-4466-8625-D61421E070F6}" type="datetimeFigureOut">
               <a:rPr lang="en-IN" smtClean="0"/>
-              <a:t>08-02-2026</a:t>
+              <a:t>10-02-2026</a:t>
             </a:fld>
             <a:endParaRPr lang="en-IN"/>
           </a:p>
@@ -3758,7 +3794,7 @@
           <a:p>
             <a:fld id="{C4095AA1-E3F7-4466-8625-D61421E070F6}" type="datetimeFigureOut">
               <a:rPr lang="en-IN" smtClean="0"/>
-              <a:t>08-02-2026</a:t>
+              <a:t>10-02-2026</a:t>
             </a:fld>
             <a:endParaRPr lang="en-IN"/>
           </a:p>
@@ -4219,7 +4255,7 @@
           <a:lstStyle/>
           <a:p>
             <a:r>
-              <a:rPr lang="en-IN" sz="8800" b="1" spc="600" dirty="0" err="1">
+              <a:rPr lang="en-IN" sz="8800" b="1" spc="600" dirty="0">
                 <a:solidFill>
                   <a:srgbClr val="DDDDDD"/>
                 </a:solidFill>
@@ -4228,7 +4264,7 @@
               <a:t>H</a:t>
             </a:r>
             <a:r>
-              <a:rPr lang="en-IN" sz="6600" b="1" spc="600" dirty="0" err="1">
+              <a:rPr lang="en-IN" sz="6600" b="1" spc="600" dirty="0">
                 <a:solidFill>
                   <a:srgbClr val="DDDDDD"/>
                 </a:solidFill>
@@ -4237,25 +4273,16 @@
               <a:t>ɸ</a:t>
             </a:r>
             <a:r>
-              <a:rPr lang="en-IN" sz="8800" b="1" spc="600" dirty="0" err="1">
-                <a:solidFill>
-                  <a:srgbClr val="DDDDDD"/>
-                </a:solidFill>
-                <a:latin typeface="Harry P" panose="00000400000000000000" pitchFamily="2" charset="0"/>
-              </a:rPr>
-              <a:t>u$e</a:t>
-            </a:r>
-            <a:r>
               <a:rPr lang="en-IN" sz="8800" b="1" spc="600" dirty="0">
                 <a:solidFill>
                   <a:srgbClr val="DDDDDD"/>
                 </a:solidFill>
                 <a:latin typeface="Harry P" panose="00000400000000000000" pitchFamily="2" charset="0"/>
               </a:rPr>
-              <a:t> </a:t>
-            </a:r>
-            <a:r>
-              <a:rPr lang="en-IN" sz="6600" b="1" spc="600" dirty="0" err="1">
+              <a:t>u$e </a:t>
+            </a:r>
+            <a:r>
+              <a:rPr lang="en-IN" sz="6600" b="1" spc="600" dirty="0">
                 <a:solidFill>
                   <a:srgbClr val="DDDDDD"/>
                 </a:solidFill>
@@ -4264,22 +4291,13 @@
               <a:t>ɸ</a:t>
             </a:r>
             <a:r>
-              <a:rPr lang="en-IN" sz="8800" b="1" spc="600" dirty="0" err="1">
-                <a:solidFill>
-                  <a:srgbClr val="DDDDDD"/>
-                </a:solidFill>
-                <a:latin typeface="Harry P" panose="00000400000000000000" pitchFamily="2" charset="0"/>
-              </a:rPr>
-              <a:t>f</a:t>
-            </a:r>
-            <a:r>
               <a:rPr lang="en-IN" sz="8800" b="1" spc="600" dirty="0">
                 <a:solidFill>
                   <a:srgbClr val="DDDDDD"/>
                 </a:solidFill>
                 <a:latin typeface="Harry P" panose="00000400000000000000" pitchFamily="2" charset="0"/>
               </a:rPr>
-              <a:t> Card$</a:t>
+              <a:t>f Card$</a:t>
             </a:r>
             <a:br>
               <a:rPr lang="en-IN" sz="8800" b="1" spc="600" dirty="0">
@@ -4454,8 +4472,8 @@
   </p:clrMapOvr>
   <mc:AlternateContent xmlns:mc="http://schemas.openxmlformats.org/markup-compatibility/2006">
     <mc:Choice xmlns:p15="http://schemas.microsoft.com/office/powerpoint/2012/main" Requires="p15">
-      <p:transition xmlns:p14="http://schemas.microsoft.com/office/powerpoint/2010/main" spd="slow" p14:dur="1250">
-        <p15:prstTrans prst="pageCurlDouble" invX="1"/>
+      <p:transition spd="slow">
+        <p15:prstTrans prst="pageCurlDouble"/>
       </p:transition>
     </mc:Choice>
     <mc:Fallback>
@@ -4484,62 +4502,12 @@
           <a:chExt cx="0" cy="0"/>
         </a:xfrm>
       </p:grpSpPr>
-      <p:sp>
-        <p:nvSpPr>
-          <p:cNvPr id="2" name="Title 1">
-            <a:extLst>
-              <a:ext uri="{FF2B5EF4-FFF2-40B4-BE49-F238E27FC236}">
-                <a16:creationId xmlns:a16="http://schemas.microsoft.com/office/drawing/2014/main" id="{3A3D749A-6D11-4C10-8493-0BE48633FEDE}"/>
-              </a:ext>
-            </a:extLst>
-          </p:cNvPr>
-          <p:cNvSpPr>
-            <a:spLocks noGrp="1"/>
-          </p:cNvSpPr>
-          <p:nvPr>
-            <p:ph type="title"/>
-          </p:nvPr>
-        </p:nvSpPr>
-        <p:spPr/>
-        <p:txBody>
-          <a:bodyPr/>
-          <a:lstStyle/>
-          <a:p>
-            <a:endParaRPr lang="en-IN"/>
-          </a:p>
-        </p:txBody>
-      </p:sp>
-      <p:sp>
-        <p:nvSpPr>
-          <p:cNvPr id="3" name="Content Placeholder 2">
-            <a:extLst>
-              <a:ext uri="{FF2B5EF4-FFF2-40B4-BE49-F238E27FC236}">
-                <a16:creationId xmlns:a16="http://schemas.microsoft.com/office/drawing/2014/main" id="{1281C42D-DC43-4A0C-8950-2CC2513EE61D}"/>
-              </a:ext>
-            </a:extLst>
-          </p:cNvPr>
-          <p:cNvSpPr>
-            <a:spLocks noGrp="1"/>
-          </p:cNvSpPr>
-          <p:nvPr>
-            <p:ph idx="1"/>
-          </p:nvPr>
-        </p:nvSpPr>
-        <p:spPr/>
-        <p:txBody>
-          <a:bodyPr/>
-          <a:lstStyle/>
-          <a:p>
-            <a:endParaRPr lang="en-IN"/>
-          </a:p>
-        </p:txBody>
-      </p:sp>
       <p:pic>
         <p:nvPicPr>
-          <p:cNvPr id="9" name="Picture 8">
-            <a:extLst>
-              <a:ext uri="{FF2B5EF4-FFF2-40B4-BE49-F238E27FC236}">
-                <a16:creationId xmlns:a16="http://schemas.microsoft.com/office/drawing/2014/main" id="{6C3BC01F-757B-47B9-965A-8B8CA8FF927A}"/>
+          <p:cNvPr id="7" name="Picture 6">
+            <a:extLst>
+              <a:ext uri="{FF2B5EF4-FFF2-40B4-BE49-F238E27FC236}">
+                <a16:creationId xmlns:a16="http://schemas.microsoft.com/office/drawing/2014/main" id="{D949D581-E5DC-405F-A4D2-69422BBD3C45}"/>
               </a:ext>
             </a:extLst>
           </p:cNvPr>
@@ -4556,8 +4524,80 @@
         </p:blipFill>
         <p:spPr>
           <a:xfrm>
-            <a:off x="0" y="1307422"/>
-            <a:ext cx="12192000" cy="4243155"/>
+            <a:off x="-644147" y="1702052"/>
+            <a:ext cx="14114035" cy="3135543"/>
+          </a:xfrm>
+          <a:prstGeom prst="rect">
+            <a:avLst/>
+          </a:prstGeom>
+        </p:spPr>
+      </p:pic>
+    </p:spTree>
+    <p:extLst>
+      <p:ext uri="{BB962C8B-B14F-4D97-AF65-F5344CB8AC3E}">
+        <p14:creationId xmlns:p14="http://schemas.microsoft.com/office/powerpoint/2010/main" val="3731190441"/>
+      </p:ext>
+    </p:extLst>
+  </p:cSld>
+  <p:clrMapOvr>
+    <a:masterClrMapping/>
+  </p:clrMapOvr>
+  <mc:AlternateContent xmlns:mc="http://schemas.openxmlformats.org/markup-compatibility/2006">
+    <mc:Choice xmlns:p15="http://schemas.microsoft.com/office/powerpoint/2012/main" Requires="p15">
+      <p:transition spd="slow">
+        <p15:prstTrans prst="pageCurlDouble" invX="1"/>
+      </p:transition>
+    </mc:Choice>
+    <mc:Fallback>
+      <p:transition spd="slow">
+        <p:fade/>
+      </p:transition>
+    </mc:Fallback>
+  </mc:AlternateContent>
+</p:sld>
+</file>
+
+<file path=ppt/slides/slide11.xml><?xml version="1.0" encoding="utf-8"?>
+<p:sld xmlns:a="http://schemas.openxmlformats.org/drawingml/2006/main" xmlns:r="http://schemas.openxmlformats.org/officeDocument/2006/relationships" xmlns:p="http://schemas.openxmlformats.org/presentationml/2006/main">
+  <p:cSld>
+    <p:spTree>
+      <p:nvGrpSpPr>
+        <p:cNvPr id="1" name=""/>
+        <p:cNvGrpSpPr/>
+        <p:nvPr/>
+      </p:nvGrpSpPr>
+      <p:grpSpPr>
+        <a:xfrm>
+          <a:off x="0" y="0"/>
+          <a:ext cx="0" cy="0"/>
+          <a:chOff x="0" y="0"/>
+          <a:chExt cx="0" cy="0"/>
+        </a:xfrm>
+      </p:grpSpPr>
+      <p:pic>
+        <p:nvPicPr>
+          <p:cNvPr id="9" name="Picture 8">
+            <a:extLst>
+              <a:ext uri="{FF2B5EF4-FFF2-40B4-BE49-F238E27FC236}">
+                <a16:creationId xmlns:a16="http://schemas.microsoft.com/office/drawing/2014/main" id="{6C3BC01F-757B-47B9-965A-8B8CA8FF927A}"/>
+              </a:ext>
+            </a:extLst>
+          </p:cNvPr>
+          <p:cNvPicPr>
+            <a:picLocks noChangeAspect="1"/>
+          </p:cNvPicPr>
+          <p:nvPr/>
+        </p:nvPicPr>
+        <p:blipFill>
+          <a:blip r:embed="rId2"/>
+          <a:stretch>
+            <a:fillRect/>
+          </a:stretch>
+        </p:blipFill>
+        <p:spPr>
+          <a:xfrm>
+            <a:off x="-772334" y="1056092"/>
+            <a:ext cx="14080696" cy="4900474"/>
           </a:xfrm>
           <a:prstGeom prst="rect">
             <a:avLst/>
@@ -4576,7 +4616,636 @@
   </p:clrMapOvr>
   <mc:AlternateContent xmlns:mc="http://schemas.openxmlformats.org/markup-compatibility/2006">
     <mc:Choice xmlns:p15="http://schemas.microsoft.com/office/powerpoint/2012/main" Requires="p15">
-      <p:transition xmlns:p14="http://schemas.microsoft.com/office/powerpoint/2010/main" spd="slow" p14:dur="1250">
+      <p:transition spd="slow">
+        <p15:prstTrans prst="pageCurlDouble"/>
+      </p:transition>
+    </mc:Choice>
+    <mc:Fallback>
+      <p:transition spd="slow">
+        <p:fade/>
+      </p:transition>
+    </mc:Fallback>
+  </mc:AlternateContent>
+</p:sld>
+</file>
+
+<file path=ppt/slides/slide12.xml><?xml version="1.0" encoding="utf-8"?>
+<p:sld xmlns:a="http://schemas.openxmlformats.org/drawingml/2006/main" xmlns:r="http://schemas.openxmlformats.org/officeDocument/2006/relationships" xmlns:p="http://schemas.openxmlformats.org/presentationml/2006/main">
+  <p:cSld>
+    <p:spTree>
+      <p:nvGrpSpPr>
+        <p:cNvPr id="1" name=""/>
+        <p:cNvGrpSpPr/>
+        <p:nvPr/>
+      </p:nvGrpSpPr>
+      <p:grpSpPr>
+        <a:xfrm>
+          <a:off x="0" y="0"/>
+          <a:ext cx="0" cy="0"/>
+          <a:chOff x="0" y="0"/>
+          <a:chExt cx="0" cy="0"/>
+        </a:xfrm>
+      </p:grpSpPr>
+      <p:sp>
+        <p:nvSpPr>
+          <p:cNvPr id="2" name="Title 1">
+            <a:extLst>
+              <a:ext uri="{FF2B5EF4-FFF2-40B4-BE49-F238E27FC236}">
+                <a16:creationId xmlns:a16="http://schemas.microsoft.com/office/drawing/2014/main" id="{0CD425AE-0252-D35F-E8FF-83E6A62C92F5}"/>
+              </a:ext>
+            </a:extLst>
+          </p:cNvPr>
+          <p:cNvSpPr>
+            <a:spLocks noGrp="1"/>
+          </p:cNvSpPr>
+          <p:nvPr>
+            <p:ph type="title"/>
+          </p:nvPr>
+        </p:nvSpPr>
+        <p:spPr/>
+        <p:txBody>
+          <a:bodyPr>
+            <a:normAutofit/>
+          </a:bodyPr>
+          <a:lstStyle/>
+          <a:p>
+            <a:r>
+              <a:rPr lang="en-US" sz="6000" dirty="0">
+                <a:solidFill>
+                  <a:srgbClr val="DDDDDD"/>
+                </a:solidFill>
+                <a:latin typeface="Harry P" panose="00000400000000000000" pitchFamily="2" charset="0"/>
+              </a:rPr>
+              <a:t>Player Money Model (Real-Money Gameplay)</a:t>
+            </a:r>
+          </a:p>
+        </p:txBody>
+      </p:sp>
+      <p:sp>
+        <p:nvSpPr>
+          <p:cNvPr id="3" name="Content Placeholder 2">
+            <a:extLst>
+              <a:ext uri="{FF2B5EF4-FFF2-40B4-BE49-F238E27FC236}">
+                <a16:creationId xmlns:a16="http://schemas.microsoft.com/office/drawing/2014/main" id="{D8E1EEF3-8489-A95D-D08F-B4BD330AD8DD}"/>
+              </a:ext>
+            </a:extLst>
+          </p:cNvPr>
+          <p:cNvSpPr>
+            <a:spLocks noGrp="1"/>
+          </p:cNvSpPr>
+          <p:nvPr>
+            <p:ph idx="1"/>
+          </p:nvPr>
+        </p:nvSpPr>
+        <p:spPr/>
+        <p:txBody>
+          <a:bodyPr>
+            <a:normAutofit/>
+          </a:bodyPr>
+          <a:lstStyle/>
+          <a:p>
+            <a:r>
+              <a:rPr lang="en-US" sz="1800" b="1" dirty="0">
+                <a:solidFill>
+                  <a:srgbClr val="DDDDDD"/>
+                </a:solidFill>
+                <a:latin typeface="Lucida Bright" panose="02040602050505020304" pitchFamily="18" charset="0"/>
+              </a:rPr>
+              <a:t>Wallet System</a:t>
+            </a:r>
+            <a:endParaRPr lang="en-US" sz="1800" dirty="0">
+              <a:solidFill>
+                <a:srgbClr val="DDDDDD"/>
+              </a:solidFill>
+              <a:latin typeface="Lucida Bright" panose="02040602050505020304" pitchFamily="18" charset="0"/>
+            </a:endParaRPr>
+          </a:p>
+          <a:p>
+            <a:pPr marL="0" indent="0">
+              <a:buNone/>
+            </a:pPr>
+            <a:r>
+              <a:rPr lang="en-US" sz="1800" dirty="0">
+                <a:solidFill>
+                  <a:srgbClr val="DDDDDD"/>
+                </a:solidFill>
+                <a:latin typeface="Lucida Bright" panose="02040602050505020304" pitchFamily="18" charset="0"/>
+                <a:cs typeface="Times New Roman" panose="02020603050405020304" pitchFamily="18" charset="0"/>
+              </a:rPr>
+              <a:t>   </a:t>
+            </a:r>
+            <a:r>
+              <a:rPr lang="en-US" sz="1200" dirty="0">
+                <a:solidFill>
+                  <a:srgbClr val="DDDDDD"/>
+                </a:solidFill>
+                <a:latin typeface="Lucida Bright" panose="02040602050505020304" pitchFamily="18" charset="0"/>
+                <a:cs typeface="Times New Roman" panose="02020603050405020304" pitchFamily="18" charset="0"/>
+              </a:rPr>
+              <a:t>Players add money to an in-game wallet</a:t>
+            </a:r>
+          </a:p>
+          <a:p>
+            <a:pPr marL="0" indent="0">
+              <a:buNone/>
+            </a:pPr>
+            <a:r>
+              <a:rPr lang="en-US" sz="1200" dirty="0">
+                <a:solidFill>
+                  <a:srgbClr val="DDDDDD"/>
+                </a:solidFill>
+                <a:latin typeface="Lucida Bright" panose="02040602050505020304" pitchFamily="18" charset="0"/>
+                <a:cs typeface="Times New Roman" panose="02020603050405020304" pitchFamily="18" charset="0"/>
+              </a:rPr>
+              <a:t>     Minimum entry amount per match (₹10 / ₹25 / ₹50 etc.)</a:t>
+            </a:r>
+          </a:p>
+          <a:p>
+            <a:pPr marL="0" indent="0">
+              <a:buNone/>
+            </a:pPr>
+            <a:endParaRPr lang="en-US" sz="1200" dirty="0">
+              <a:solidFill>
+                <a:srgbClr val="DDDDDD"/>
+              </a:solidFill>
+              <a:latin typeface="Lucida Bright" panose="02040602050505020304" pitchFamily="18" charset="0"/>
+            </a:endParaRPr>
+          </a:p>
+          <a:p>
+            <a:r>
+              <a:rPr lang="en-US" sz="1800" b="1" dirty="0">
+                <a:solidFill>
+                  <a:srgbClr val="DDDDDD"/>
+                </a:solidFill>
+                <a:latin typeface="Lucida Bright" panose="02040602050505020304" pitchFamily="18" charset="0"/>
+              </a:rPr>
+              <a:t>Paid Matches</a:t>
+            </a:r>
+            <a:endParaRPr lang="en-US" sz="1800" dirty="0">
+              <a:solidFill>
+                <a:srgbClr val="DDDDDD"/>
+              </a:solidFill>
+              <a:latin typeface="Lucida Bright" panose="02040602050505020304" pitchFamily="18" charset="0"/>
+            </a:endParaRPr>
+          </a:p>
+          <a:p>
+            <a:pPr marL="0" indent="0">
+              <a:buNone/>
+            </a:pPr>
+            <a:r>
+              <a:rPr lang="en-US" sz="1200" dirty="0">
+                <a:solidFill>
+                  <a:srgbClr val="DDDDDD"/>
+                </a:solidFill>
+                <a:latin typeface="Lucida Bright" panose="02040602050505020304" pitchFamily="18" charset="0"/>
+              </a:rPr>
+              <a:t>    </a:t>
+            </a:r>
+            <a:r>
+              <a:rPr lang="en-US" sz="1200" dirty="0">
+                <a:solidFill>
+                  <a:srgbClr val="DDDDDD"/>
+                </a:solidFill>
+                <a:latin typeface="Lucida Bright" panose="02040602050505020304" pitchFamily="18" charset="0"/>
+                <a:cs typeface="Times New Roman" panose="02020603050405020304" pitchFamily="18" charset="0"/>
+              </a:rPr>
+              <a:t>Players join cash games by paying an entry fee</a:t>
+            </a:r>
+          </a:p>
+          <a:p>
+            <a:pPr marL="0" indent="0">
+              <a:buNone/>
+            </a:pPr>
+            <a:r>
+              <a:rPr lang="en-US" sz="1200" dirty="0">
+                <a:solidFill>
+                  <a:srgbClr val="DDDDDD"/>
+                </a:solidFill>
+                <a:latin typeface="Lucida Bright" panose="02040602050505020304" pitchFamily="18" charset="0"/>
+                <a:cs typeface="Times New Roman" panose="02020603050405020304" pitchFamily="18" charset="0"/>
+              </a:rPr>
+              <a:t>    Winner(s) receive prize money from the pool</a:t>
+            </a:r>
+          </a:p>
+          <a:p>
+            <a:pPr marL="0" indent="0">
+              <a:buNone/>
+            </a:pPr>
+            <a:endParaRPr lang="en-US" sz="1200" dirty="0">
+              <a:solidFill>
+                <a:srgbClr val="DDDDDD"/>
+              </a:solidFill>
+              <a:latin typeface="Lucida Bright" panose="02040602050505020304" pitchFamily="18" charset="0"/>
+            </a:endParaRPr>
+          </a:p>
+          <a:p>
+            <a:r>
+              <a:rPr lang="en-US" sz="1800" b="1" dirty="0">
+                <a:solidFill>
+                  <a:srgbClr val="DDDDDD"/>
+                </a:solidFill>
+                <a:latin typeface="Lucida Bright" panose="02040602050505020304" pitchFamily="18" charset="0"/>
+              </a:rPr>
+              <a:t>Practice vs Cash Mode</a:t>
+            </a:r>
+            <a:endParaRPr lang="en-US" sz="1800" dirty="0">
+              <a:solidFill>
+                <a:srgbClr val="DDDDDD"/>
+              </a:solidFill>
+              <a:latin typeface="Lucida Bright" panose="02040602050505020304" pitchFamily="18" charset="0"/>
+            </a:endParaRPr>
+          </a:p>
+          <a:p>
+            <a:pPr marL="0" indent="0">
+              <a:buNone/>
+            </a:pPr>
+            <a:r>
+              <a:rPr lang="en-US" sz="1200" dirty="0">
+                <a:solidFill>
+                  <a:srgbClr val="DDDDDD"/>
+                </a:solidFill>
+                <a:latin typeface="Lucida Bright" panose="02040602050505020304" pitchFamily="18" charset="0"/>
+              </a:rPr>
+              <a:t>    </a:t>
+            </a:r>
+            <a:r>
+              <a:rPr lang="en-US" sz="1200" dirty="0">
+                <a:solidFill>
+                  <a:srgbClr val="DDDDDD"/>
+                </a:solidFill>
+                <a:latin typeface="Lucida Bright" panose="02040602050505020304" pitchFamily="18" charset="0"/>
+                <a:cs typeface="Times New Roman" panose="02020603050405020304" pitchFamily="18" charset="0"/>
+              </a:rPr>
+              <a:t>Free mode with virtual coins</a:t>
+            </a:r>
+          </a:p>
+          <a:p>
+            <a:pPr marL="0" indent="0">
+              <a:buNone/>
+            </a:pPr>
+            <a:r>
+              <a:rPr lang="en-US" sz="1200" dirty="0">
+                <a:solidFill>
+                  <a:srgbClr val="DDDDDD"/>
+                </a:solidFill>
+                <a:latin typeface="Lucida Bright" panose="02040602050505020304" pitchFamily="18" charset="0"/>
+                <a:cs typeface="Times New Roman" panose="02020603050405020304" pitchFamily="18" charset="0"/>
+              </a:rPr>
+              <a:t>    Cash mode uses real money for competitive play</a:t>
+            </a:r>
+          </a:p>
+          <a:p>
+            <a:endParaRPr lang="en-US" sz="1800" dirty="0">
+              <a:solidFill>
+                <a:schemeClr val="bg1">
+                  <a:lumMod val="75000"/>
+                </a:schemeClr>
+              </a:solidFill>
+              <a:latin typeface="Lucida Bright" panose="02040602050505020304" pitchFamily="18" charset="0"/>
+            </a:endParaRPr>
+          </a:p>
+          <a:p>
+            <a:r>
+              <a:rPr lang="en-US" sz="2400" b="1" dirty="0">
+                <a:solidFill>
+                  <a:schemeClr val="bg1">
+                    <a:lumMod val="75000"/>
+                  </a:schemeClr>
+                </a:solidFill>
+                <a:latin typeface="Lucida Bright" panose="02040602050505020304" pitchFamily="18" charset="0"/>
+              </a:rPr>
+              <a:t>We believe in GO BIG OR GO HOME!!!</a:t>
+            </a:r>
+          </a:p>
+        </p:txBody>
+      </p:sp>
+      <p:pic>
+        <p:nvPicPr>
+          <p:cNvPr id="5" name="Picture 4">
+            <a:extLst>
+              <a:ext uri="{FF2B5EF4-FFF2-40B4-BE49-F238E27FC236}">
+                <a16:creationId xmlns:a16="http://schemas.microsoft.com/office/drawing/2014/main" id="{29C05B0E-E52E-569D-D7C4-EB367E41F162}"/>
+              </a:ext>
+            </a:extLst>
+          </p:cNvPr>
+          <p:cNvPicPr>
+            <a:picLocks noChangeAspect="1"/>
+          </p:cNvPicPr>
+          <p:nvPr/>
+        </p:nvPicPr>
+        <p:blipFill>
+          <a:blip r:embed="rId2">
+            <a:alphaModFix amt="70000"/>
+            <a:extLst>
+              <a:ext uri="{BEBA8EAE-BF5A-486C-A8C5-ECC9F3942E4B}">
+                <a14:imgProps xmlns:a14="http://schemas.microsoft.com/office/drawing/2010/main">
+                  <a14:imgLayer r:embed="rId3">
+                    <a14:imgEffect>
+                      <a14:artisticMosiaicBubbles/>
+                    </a14:imgEffect>
+                  </a14:imgLayer>
+                </a14:imgProps>
+              </a:ext>
+              <a:ext uri="{28A0092B-C50C-407E-A947-70E740481C1C}">
+                <a14:useLocalDpi xmlns:a14="http://schemas.microsoft.com/office/drawing/2010/main" val="0"/>
+              </a:ext>
+            </a:extLst>
+          </a:blip>
+          <a:stretch>
+            <a:fillRect/>
+          </a:stretch>
+        </p:blipFill>
+        <p:spPr>
+          <a:xfrm flipH="1">
+            <a:off x="7398635" y="1387198"/>
+            <a:ext cx="4392930" cy="4392930"/>
+          </a:xfrm>
+          <a:prstGeom prst="rect">
+            <a:avLst/>
+          </a:prstGeom>
+        </p:spPr>
+      </p:pic>
+      <p:sp>
+        <p:nvSpPr>
+          <p:cNvPr id="4" name="TextBox 3">
+            <a:extLst>
+              <a:ext uri="{FF2B5EF4-FFF2-40B4-BE49-F238E27FC236}">
+                <a16:creationId xmlns:a16="http://schemas.microsoft.com/office/drawing/2014/main" id="{7420613A-C0E9-43AF-8CCF-13F8AADBFD0A}"/>
+              </a:ext>
+            </a:extLst>
+          </p:cNvPr>
+          <p:cNvSpPr txBox="1"/>
+          <p:nvPr/>
+        </p:nvSpPr>
+        <p:spPr>
+          <a:xfrm>
+            <a:off x="7634797" y="5604027"/>
+            <a:ext cx="4392931" cy="707886"/>
+          </a:xfrm>
+          <a:prstGeom prst="rect">
+            <a:avLst/>
+          </a:prstGeom>
+          <a:noFill/>
+        </p:spPr>
+        <p:txBody>
+          <a:bodyPr wrap="square" rtlCol="0">
+            <a:spAutoFit/>
+          </a:bodyPr>
+          <a:lstStyle/>
+          <a:p>
+            <a:pPr algn="ctr"/>
+            <a:r>
+              <a:rPr lang="en-US" sz="2000" b="1" dirty="0">
+                <a:solidFill>
+                  <a:srgbClr val="DDDDDD"/>
+                </a:solidFill>
+                <a:effectLst/>
+                <a:latin typeface="Lucida Bright" panose="02040602050505020304" pitchFamily="18" charset="0"/>
+              </a:rPr>
+              <a:t>Gambling was promised to you 3,000 years ago</a:t>
+            </a:r>
+          </a:p>
+        </p:txBody>
+      </p:sp>
+    </p:spTree>
+    <p:extLst>
+      <p:ext uri="{BB962C8B-B14F-4D97-AF65-F5344CB8AC3E}">
+        <p14:creationId xmlns:p14="http://schemas.microsoft.com/office/powerpoint/2010/main" val="3993488775"/>
+      </p:ext>
+    </p:extLst>
+  </p:cSld>
+  <p:clrMapOvr>
+    <a:masterClrMapping/>
+  </p:clrMapOvr>
+  <mc:AlternateContent xmlns:mc="http://schemas.openxmlformats.org/markup-compatibility/2006">
+    <mc:Choice xmlns:p15="http://schemas.microsoft.com/office/powerpoint/2012/main" Requires="p15">
+      <p:transition spd="slow">
+        <p15:prstTrans prst="pageCurlDouble" invX="1"/>
+      </p:transition>
+    </mc:Choice>
+    <mc:Fallback>
+      <p:transition spd="slow">
+        <p:fade/>
+      </p:transition>
+    </mc:Fallback>
+  </mc:AlternateContent>
+</p:sld>
+</file>
+
+<file path=ppt/slides/slide13.xml><?xml version="1.0" encoding="utf-8"?>
+<p:sld xmlns:a="http://schemas.openxmlformats.org/drawingml/2006/main" xmlns:r="http://schemas.openxmlformats.org/officeDocument/2006/relationships" xmlns:p="http://schemas.openxmlformats.org/presentationml/2006/main">
+  <p:cSld>
+    <p:spTree>
+      <p:nvGrpSpPr>
+        <p:cNvPr id="1" name=""/>
+        <p:cNvGrpSpPr/>
+        <p:nvPr/>
+      </p:nvGrpSpPr>
+      <p:grpSpPr>
+        <a:xfrm>
+          <a:off x="0" y="0"/>
+          <a:ext cx="0" cy="0"/>
+          <a:chOff x="0" y="0"/>
+          <a:chExt cx="0" cy="0"/>
+        </a:xfrm>
+      </p:grpSpPr>
+      <p:sp>
+        <p:nvSpPr>
+          <p:cNvPr id="2" name="TextBox 1">
+            <a:extLst>
+              <a:ext uri="{FF2B5EF4-FFF2-40B4-BE49-F238E27FC236}">
+                <a16:creationId xmlns:a16="http://schemas.microsoft.com/office/drawing/2014/main" id="{926C0BDF-E5DD-56A5-0E90-EF4C71DF09A0}"/>
+              </a:ext>
+            </a:extLst>
+          </p:cNvPr>
+          <p:cNvSpPr txBox="1"/>
+          <p:nvPr/>
+        </p:nvSpPr>
+        <p:spPr>
+          <a:xfrm>
+            <a:off x="4047201" y="2644170"/>
+            <a:ext cx="4097597" cy="1569660"/>
+          </a:xfrm>
+          <a:prstGeom prst="rect">
+            <a:avLst/>
+          </a:prstGeom>
+          <a:noFill/>
+        </p:spPr>
+        <p:txBody>
+          <a:bodyPr wrap="none" rtlCol="0">
+            <a:spAutoFit/>
+          </a:bodyPr>
+          <a:lstStyle/>
+          <a:p>
+            <a:r>
+              <a:rPr lang="en-US" sz="9600" dirty="0">
+                <a:solidFill>
+                  <a:srgbClr val="DDDDDD"/>
+                </a:solidFill>
+                <a:latin typeface="Harry P" panose="00000400000000000000" pitchFamily="2" charset="0"/>
+              </a:rPr>
+              <a:t>Thank you</a:t>
+            </a:r>
+          </a:p>
+        </p:txBody>
+      </p:sp>
+      <p:pic>
+        <p:nvPicPr>
+          <p:cNvPr id="9" name="Picture 8">
+            <a:extLst>
+              <a:ext uri="{FF2B5EF4-FFF2-40B4-BE49-F238E27FC236}">
+                <a16:creationId xmlns:a16="http://schemas.microsoft.com/office/drawing/2014/main" id="{2DD89A10-8EB7-4D53-A220-E2305FD57DE0}"/>
+              </a:ext>
+            </a:extLst>
+          </p:cNvPr>
+          <p:cNvPicPr>
+            <a:picLocks noChangeAspect="1"/>
+          </p:cNvPicPr>
+          <p:nvPr/>
+        </p:nvPicPr>
+        <p:blipFill>
+          <a:blip r:embed="rId2">
+            <a:extLst>
+              <a:ext uri="{28A0092B-C50C-407E-A947-70E740481C1C}">
+                <a14:useLocalDpi xmlns:a14="http://schemas.microsoft.com/office/drawing/2010/main" val="0"/>
+              </a:ext>
+            </a:extLst>
+          </a:blip>
+          <a:stretch>
+            <a:fillRect/>
+          </a:stretch>
+        </p:blipFill>
+        <p:spPr>
+          <a:xfrm>
+            <a:off x="354000" y="4196182"/>
+            <a:ext cx="2340000" cy="2340000"/>
+          </a:xfrm>
+          <a:prstGeom prst="rect">
+            <a:avLst/>
+          </a:prstGeom>
+        </p:spPr>
+      </p:pic>
+      <p:pic>
+        <p:nvPicPr>
+          <p:cNvPr id="11" name="Picture 10">
+            <a:extLst>
+              <a:ext uri="{FF2B5EF4-FFF2-40B4-BE49-F238E27FC236}">
+                <a16:creationId xmlns:a16="http://schemas.microsoft.com/office/drawing/2014/main" id="{7DDF5B0A-36E8-423C-8D32-F1B783F231B8}"/>
+              </a:ext>
+            </a:extLst>
+          </p:cNvPr>
+          <p:cNvPicPr>
+            <a:picLocks noChangeAspect="1"/>
+          </p:cNvPicPr>
+          <p:nvPr/>
+        </p:nvPicPr>
+        <p:blipFill>
+          <a:blip r:embed="rId3">
+            <a:extLst>
+              <a:ext uri="{28A0092B-C50C-407E-A947-70E740481C1C}">
+                <a14:useLocalDpi xmlns:a14="http://schemas.microsoft.com/office/drawing/2010/main" val="0"/>
+              </a:ext>
+            </a:extLst>
+          </a:blip>
+          <a:stretch>
+            <a:fillRect/>
+          </a:stretch>
+        </p:blipFill>
+        <p:spPr>
+          <a:xfrm>
+            <a:off x="360000" y="360000"/>
+            <a:ext cx="2340000" cy="2340000"/>
+          </a:xfrm>
+          <a:prstGeom prst="rect">
+            <a:avLst/>
+          </a:prstGeom>
+        </p:spPr>
+      </p:pic>
+      <p:pic>
+        <p:nvPicPr>
+          <p:cNvPr id="12" name="Picture 11">
+            <a:extLst>
+              <a:ext uri="{FF2B5EF4-FFF2-40B4-BE49-F238E27FC236}">
+                <a16:creationId xmlns:a16="http://schemas.microsoft.com/office/drawing/2014/main" id="{E97127BB-7DD2-4C04-A397-2F0BAC60150B}"/>
+              </a:ext>
+            </a:extLst>
+          </p:cNvPr>
+          <p:cNvPicPr>
+            <a:picLocks noChangeAspect="1"/>
+          </p:cNvPicPr>
+          <p:nvPr/>
+        </p:nvPicPr>
+        <p:blipFill>
+          <a:blip r:embed="rId4">
+            <a:extLst>
+              <a:ext uri="{28A0092B-C50C-407E-A947-70E740481C1C}">
+                <a14:useLocalDpi xmlns:a14="http://schemas.microsoft.com/office/drawing/2010/main" val="0"/>
+              </a:ext>
+            </a:extLst>
+          </a:blip>
+          <a:stretch>
+            <a:fillRect/>
+          </a:stretch>
+        </p:blipFill>
+        <p:spPr>
+          <a:xfrm>
+            <a:off x="9498000" y="360000"/>
+            <a:ext cx="2340000" cy="2340000"/>
+          </a:xfrm>
+          <a:prstGeom prst="rect">
+            <a:avLst/>
+          </a:prstGeom>
+        </p:spPr>
+      </p:pic>
+      <p:pic>
+        <p:nvPicPr>
+          <p:cNvPr id="13" name="Picture 12">
+            <a:extLst>
+              <a:ext uri="{FF2B5EF4-FFF2-40B4-BE49-F238E27FC236}">
+                <a16:creationId xmlns:a16="http://schemas.microsoft.com/office/drawing/2014/main" id="{5771E547-D71C-4A26-A851-4613A086C6DB}"/>
+              </a:ext>
+            </a:extLst>
+          </p:cNvPr>
+          <p:cNvPicPr>
+            <a:picLocks noChangeAspect="1"/>
+          </p:cNvPicPr>
+          <p:nvPr/>
+        </p:nvPicPr>
+        <p:blipFill>
+          <a:blip r:embed="rId5">
+            <a:extLst>
+              <a:ext uri="{28A0092B-C50C-407E-A947-70E740481C1C}">
+                <a14:useLocalDpi xmlns:a14="http://schemas.microsoft.com/office/drawing/2010/main" val="0"/>
+              </a:ext>
+            </a:extLst>
+          </a:blip>
+          <a:stretch>
+            <a:fillRect/>
+          </a:stretch>
+        </p:blipFill>
+        <p:spPr>
+          <a:xfrm>
+            <a:off x="9492000" y="4256291"/>
+            <a:ext cx="2340000" cy="2340000"/>
+          </a:xfrm>
+          <a:prstGeom prst="rect">
+            <a:avLst/>
+          </a:prstGeom>
+        </p:spPr>
+      </p:pic>
+    </p:spTree>
+    <p:extLst>
+      <p:ext uri="{BB962C8B-B14F-4D97-AF65-F5344CB8AC3E}">
+        <p14:creationId xmlns:p14="http://schemas.microsoft.com/office/powerpoint/2010/main" val="2553309343"/>
+      </p:ext>
+    </p:extLst>
+  </p:cSld>
+  <p:clrMapOvr>
+    <a:masterClrMapping/>
+  </p:clrMapOvr>
+  <mc:AlternateContent xmlns:mc="http://schemas.openxmlformats.org/markup-compatibility/2006">
+    <mc:Choice xmlns:p15="http://schemas.microsoft.com/office/powerpoint/2012/main" Requires="p15">
+      <p:transition spd="slow">
         <p15:prstTrans prst="pageCurlDouble"/>
       </p:transition>
     </mc:Choice>
@@ -4774,7 +5443,7 @@
                 <a:solidFill>
                   <a:srgbClr val="DDDDDD"/>
                 </a:solidFill>
-                <a:latin typeface="Harry P" panose="00000400000000000000" pitchFamily="2" charset="0"/>
+                <a:latin typeface="Harry P" panose="020F0502020204030204" pitchFamily="2" charset="0"/>
               </a:rPr>
               <a:t>Guide</a:t>
             </a:r>
@@ -4782,6 +5451,7 @@
               <a:solidFill>
                 <a:srgbClr val="DDDDDD"/>
               </a:solidFill>
+              <a:latin typeface="Harry P" panose="020F0502020204030204" pitchFamily="2" charset="0"/>
             </a:endParaRPr>
           </a:p>
         </p:txBody>
@@ -5018,7 +5688,7 @@
                 </a:solidFill>
                 <a:latin typeface="Lucida Bright" panose="02040602050505020304" pitchFamily="18" charset="0"/>
               </a:rPr>
-              <a:t>SAMEER SHAIKH</a:t>
+              <a:t>HAADIYA SAYED</a:t>
             </a:r>
             <a:endParaRPr lang="en-IN" spc="300" dirty="0">
               <a:solidFill>
@@ -5041,8 +5711,8 @@
   </p:clrMapOvr>
   <mc:AlternateContent xmlns:mc="http://schemas.openxmlformats.org/markup-compatibility/2006">
     <mc:Choice xmlns:p15="http://schemas.microsoft.com/office/powerpoint/2012/main" Requires="p15">
-      <p:transition xmlns:p14="http://schemas.microsoft.com/office/powerpoint/2010/main" spd="slow" p14:dur="1250">
-        <p15:prstTrans prst="pageCurlDouble"/>
+      <p:transition spd="slow">
+        <p15:prstTrans prst="pageCurlDouble" invX="1"/>
       </p:transition>
     </mc:Choice>
     <mc:Fallback>
@@ -5073,10 +5743,10 @@
       </p:grpSpPr>
       <p:sp>
         <p:nvSpPr>
-          <p:cNvPr id="7" name="Title 6">
-            <a:extLst>
-              <a:ext uri="{FF2B5EF4-FFF2-40B4-BE49-F238E27FC236}">
-                <a16:creationId xmlns:a16="http://schemas.microsoft.com/office/drawing/2014/main" id="{AAEF762D-875B-4524-A9AC-B0914487AA1B}"/>
+          <p:cNvPr id="2" name="Title 1">
+            <a:extLst>
+              <a:ext uri="{FF2B5EF4-FFF2-40B4-BE49-F238E27FC236}">
+                <a16:creationId xmlns:a16="http://schemas.microsoft.com/office/drawing/2014/main" id="{547FFB06-9B28-4FBD-B0B3-1ECC3D86DD52}"/>
               </a:ext>
             </a:extLst>
           </p:cNvPr>
@@ -5089,19 +5759,72 @@
         </p:nvSpPr>
         <p:spPr/>
         <p:txBody>
-          <a:bodyPr/>
-          <a:lstStyle/>
-          <a:p>
-            <a:endParaRPr lang="en-IN"/>
-          </a:p>
-        </p:txBody>
-      </p:sp>
-      <p:sp>
-        <p:nvSpPr>
-          <p:cNvPr id="9" name="Content Placeholder 8">
-            <a:extLst>
-              <a:ext uri="{FF2B5EF4-FFF2-40B4-BE49-F238E27FC236}">
-                <a16:creationId xmlns:a16="http://schemas.microsoft.com/office/drawing/2014/main" id="{86708467-97D3-487D-BC7D-5DCBE83922B6}"/>
+          <a:bodyPr>
+            <a:normAutofit/>
+          </a:bodyPr>
+          <a:lstStyle/>
+          <a:p>
+            <a:pPr algn="ctr"/>
+            <a:r>
+              <a:rPr lang="en-US" sz="8800" dirty="0" err="1">
+                <a:solidFill>
+                  <a:srgbClr val="DDDDDD"/>
+                </a:solidFill>
+                <a:latin typeface="Harry P" panose="00000400000000000000" pitchFamily="2" charset="0"/>
+              </a:rPr>
+              <a:t>Pr</a:t>
+            </a:r>
+            <a:r>
+              <a:rPr lang="en-IN" sz="6000" b="1" spc="600" dirty="0">
+                <a:solidFill>
+                  <a:srgbClr val="DDDDDD"/>
+                </a:solidFill>
+                <a:latin typeface="Harry P" panose="00000400000000000000" pitchFamily="2" charset="0"/>
+              </a:rPr>
+              <a:t>ɸ</a:t>
+            </a:r>
+            <a:r>
+              <a:rPr lang="en-US" sz="8800" dirty="0" err="1">
+                <a:solidFill>
+                  <a:srgbClr val="DDDDDD"/>
+                </a:solidFill>
+                <a:latin typeface="Harry P" panose="00000400000000000000" pitchFamily="2" charset="0"/>
+              </a:rPr>
+              <a:t>blem</a:t>
+            </a:r>
+            <a:r>
+              <a:rPr lang="en-US" sz="8800" dirty="0">
+                <a:solidFill>
+                  <a:srgbClr val="DDDDDD"/>
+                </a:solidFill>
+                <a:latin typeface="Harry P" panose="00000400000000000000" pitchFamily="2" charset="0"/>
+              </a:rPr>
+              <a:t> $</a:t>
+            </a:r>
+            <a:r>
+              <a:rPr lang="en-US" sz="8800" dirty="0" err="1">
+                <a:solidFill>
+                  <a:srgbClr val="DDDDDD"/>
+                </a:solidFill>
+                <a:latin typeface="Harry P" panose="00000400000000000000" pitchFamily="2" charset="0"/>
+              </a:rPr>
+              <a:t>tatement</a:t>
+            </a:r>
+            <a:endParaRPr lang="en-IN" sz="8800" dirty="0">
+              <a:solidFill>
+                <a:srgbClr val="DDDDDD"/>
+              </a:solidFill>
+              <a:latin typeface="Harry P" panose="00000400000000000000" pitchFamily="2" charset="0"/>
+            </a:endParaRPr>
+          </a:p>
+        </p:txBody>
+      </p:sp>
+      <p:sp>
+        <p:nvSpPr>
+          <p:cNvPr id="3" name="Content Placeholder 2">
+            <a:extLst>
+              <a:ext uri="{FF2B5EF4-FFF2-40B4-BE49-F238E27FC236}">
+                <a16:creationId xmlns:a16="http://schemas.microsoft.com/office/drawing/2014/main" id="{9765AB57-03A1-4A68-952D-FA4267675416}"/>
               </a:ext>
             </a:extLst>
           </p:cNvPr>
@@ -5112,49 +5835,91 @@
             <p:ph idx="1"/>
           </p:nvPr>
         </p:nvSpPr>
-        <p:spPr/>
-        <p:txBody>
-          <a:bodyPr/>
-          <a:lstStyle/>
-          <a:p>
-            <a:endParaRPr lang="en-IN"/>
-          </a:p>
-        </p:txBody>
-      </p:sp>
-      <p:pic>
-        <p:nvPicPr>
-          <p:cNvPr id="13" name="Picture 12">
-            <a:extLst>
-              <a:ext uri="{FF2B5EF4-FFF2-40B4-BE49-F238E27FC236}">
-                <a16:creationId xmlns:a16="http://schemas.microsoft.com/office/drawing/2014/main" id="{5E7FE290-99ED-4065-B076-B67B65FF1C81}"/>
-              </a:ext>
-            </a:extLst>
-          </p:cNvPr>
-          <p:cNvPicPr>
-            <a:picLocks noChangeAspect="1"/>
-          </p:cNvPicPr>
-          <p:nvPr/>
-        </p:nvPicPr>
-        <p:blipFill>
-          <a:blip r:embed="rId3"/>
-          <a:stretch>
-            <a:fillRect/>
-          </a:stretch>
-        </p:blipFill>
         <p:spPr>
           <a:xfrm>
-            <a:off x="0" y="-88900"/>
-            <a:ext cx="12192000" cy="7035800"/>
+            <a:off x="266700" y="2025650"/>
+            <a:ext cx="11658600" cy="4832350"/>
           </a:xfrm>
-          <a:prstGeom prst="rect">
-            <a:avLst/>
-          </a:prstGeom>
         </p:spPr>
-      </p:pic>
+        <p:txBody>
+          <a:bodyPr/>
+          <a:lstStyle/>
+          <a:p>
+            <a:pPr>
+              <a:lnSpc>
+                <a:spcPct val="100000"/>
+              </a:lnSpc>
+            </a:pPr>
+            <a:r>
+              <a:rPr lang="en-US" dirty="0">
+                <a:solidFill>
+                  <a:srgbClr val="DDDDDD"/>
+                </a:solidFill>
+                <a:latin typeface="Lucida Bright" panose="02040602050505020304" pitchFamily="18" charset="0"/>
+              </a:rPr>
+              <a:t>Traditional card games depend mostly on luck and offer limited strategic depth. House of Cards is a themed card game that combines numerical risk management with special-action cards from different houses and a bit of luck. </a:t>
+            </a:r>
+          </a:p>
+          <a:p>
+            <a:pPr>
+              <a:lnSpc>
+                <a:spcPct val="100000"/>
+              </a:lnSpc>
+            </a:pPr>
+            <a:r>
+              <a:rPr lang="en-US" dirty="0">
+                <a:solidFill>
+                  <a:srgbClr val="DDDDDD"/>
+                </a:solidFill>
+                <a:latin typeface="Lucida Bright" panose="02040602050505020304" pitchFamily="18" charset="0"/>
+              </a:rPr>
+              <a:t>The game supports both human players and AI-controlled bots, allowing solo practice and strategy learning. </a:t>
+            </a:r>
+          </a:p>
+          <a:p>
+            <a:pPr>
+              <a:lnSpc>
+                <a:spcPct val="100000"/>
+              </a:lnSpc>
+            </a:pPr>
+            <a:r>
+              <a:rPr lang="en-US" dirty="0">
+                <a:solidFill>
+                  <a:srgbClr val="DDDDDD"/>
+                </a:solidFill>
+                <a:latin typeface="Lucida Bright" panose="02040602050505020304" pitchFamily="18" charset="0"/>
+              </a:rPr>
+              <a:t>Special cards introduce dynamic effects such as doubling values, copying moves, swapping cards, and blocking actions, making gameplay more interactive, competitive, and </a:t>
+            </a:r>
+            <a:r>
+              <a:rPr lang="en-US" dirty="0" err="1">
+                <a:solidFill>
+                  <a:srgbClr val="DDDDDD"/>
+                </a:solidFill>
+                <a:latin typeface="Lucida Bright" panose="02040602050505020304" pitchFamily="18" charset="0"/>
+              </a:rPr>
+              <a:t>replayable</a:t>
+            </a:r>
+            <a:r>
+              <a:rPr lang="en-US" dirty="0">
+                <a:solidFill>
+                  <a:srgbClr val="DDDDDD"/>
+                </a:solidFill>
+              </a:rPr>
+              <a:t>.</a:t>
+            </a:r>
+            <a:endParaRPr lang="en-IN" dirty="0">
+              <a:solidFill>
+                <a:srgbClr val="DDDDDD"/>
+              </a:solidFill>
+            </a:endParaRPr>
+          </a:p>
+        </p:txBody>
+      </p:sp>
     </p:spTree>
     <p:extLst>
       <p:ext uri="{BB962C8B-B14F-4D97-AF65-F5344CB8AC3E}">
-        <p14:creationId xmlns:p14="http://schemas.microsoft.com/office/powerpoint/2010/main" val="1202318985"/>
+        <p14:creationId xmlns:p14="http://schemas.microsoft.com/office/powerpoint/2010/main" val="876544280"/>
       </p:ext>
     </p:extLst>
   </p:cSld>
@@ -5163,8 +5928,8 @@
   </p:clrMapOvr>
   <mc:AlternateContent xmlns:mc="http://schemas.openxmlformats.org/markup-compatibility/2006">
     <mc:Choice xmlns:p15="http://schemas.microsoft.com/office/powerpoint/2012/main" Requires="p15">
-      <p:transition xmlns:p14="http://schemas.microsoft.com/office/powerpoint/2010/main" spd="slow" p14:dur="1250">
-        <p15:prstTrans prst="pageCurlDouble" invX="1"/>
+      <p:transition spd="slow">
+        <p15:prstTrans prst="pageCurlDouble"/>
       </p:transition>
     </mc:Choice>
     <mc:Fallback>
@@ -5198,7 +5963,7 @@
           <p:cNvPr id="7" name="Title 6">
             <a:extLst>
               <a:ext uri="{FF2B5EF4-FFF2-40B4-BE49-F238E27FC236}">
-                <a16:creationId xmlns:a16="http://schemas.microsoft.com/office/drawing/2014/main" id="{A8286EB3-CEEF-4763-BD1E-15FC504BCD2C}"/>
+                <a16:creationId xmlns:a16="http://schemas.microsoft.com/office/drawing/2014/main" id="{AAEF762D-875B-4524-A9AC-B0914487AA1B}"/>
               </a:ext>
             </a:extLst>
           </p:cNvPr>
@@ -5223,7 +5988,7 @@
           <p:cNvPr id="9" name="Content Placeholder 8">
             <a:extLst>
               <a:ext uri="{FF2B5EF4-FFF2-40B4-BE49-F238E27FC236}">
-                <a16:creationId xmlns:a16="http://schemas.microsoft.com/office/drawing/2014/main" id="{BF6CE5AC-8294-4559-99E8-380D339D11B8}"/>
+                <a16:creationId xmlns:a16="http://schemas.microsoft.com/office/drawing/2014/main" id="{86708467-97D3-487D-BC7D-5DCBE83922B6}"/>
               </a:ext>
             </a:extLst>
           </p:cNvPr>
@@ -5243,6 +6008,78 @@
           </a:p>
         </p:txBody>
       </p:sp>
+      <p:pic>
+        <p:nvPicPr>
+          <p:cNvPr id="13" name="Picture 12">
+            <a:extLst>
+              <a:ext uri="{FF2B5EF4-FFF2-40B4-BE49-F238E27FC236}">
+                <a16:creationId xmlns:a16="http://schemas.microsoft.com/office/drawing/2014/main" id="{5E7FE290-99ED-4065-B076-B67B65FF1C81}"/>
+              </a:ext>
+            </a:extLst>
+          </p:cNvPr>
+          <p:cNvPicPr>
+            <a:picLocks noChangeAspect="1"/>
+          </p:cNvPicPr>
+          <p:nvPr/>
+        </p:nvPicPr>
+        <p:blipFill>
+          <a:blip r:embed="rId3"/>
+          <a:stretch>
+            <a:fillRect/>
+          </a:stretch>
+        </p:blipFill>
+        <p:spPr>
+          <a:xfrm>
+            <a:off x="-157211" y="-246299"/>
+            <a:ext cx="12506421" cy="7217247"/>
+          </a:xfrm>
+          <a:prstGeom prst="rect">
+            <a:avLst/>
+          </a:prstGeom>
+        </p:spPr>
+      </p:pic>
+    </p:spTree>
+    <p:extLst>
+      <p:ext uri="{BB962C8B-B14F-4D97-AF65-F5344CB8AC3E}">
+        <p14:creationId xmlns:p14="http://schemas.microsoft.com/office/powerpoint/2010/main" val="1202318985"/>
+      </p:ext>
+    </p:extLst>
+  </p:cSld>
+  <p:clrMapOvr>
+    <a:masterClrMapping/>
+  </p:clrMapOvr>
+  <mc:AlternateContent xmlns:mc="http://schemas.openxmlformats.org/markup-compatibility/2006">
+    <mc:Choice xmlns:p15="http://schemas.microsoft.com/office/powerpoint/2012/main" Requires="p15">
+      <p:transition spd="slow">
+        <p15:prstTrans prst="pageCurlDouble" invX="1"/>
+      </p:transition>
+    </mc:Choice>
+    <mc:Fallback>
+      <p:transition spd="slow">
+        <p:fade/>
+      </p:transition>
+    </mc:Fallback>
+  </mc:AlternateContent>
+</p:sld>
+</file>
+
+<file path=ppt/slides/slide5.xml><?xml version="1.0" encoding="utf-8"?>
+<p:sld xmlns:a="http://schemas.openxmlformats.org/drawingml/2006/main" xmlns:r="http://schemas.openxmlformats.org/officeDocument/2006/relationships" xmlns:p="http://schemas.openxmlformats.org/presentationml/2006/main">
+  <p:cSld>
+    <p:spTree>
+      <p:nvGrpSpPr>
+        <p:cNvPr id="1" name=""/>
+        <p:cNvGrpSpPr/>
+        <p:nvPr/>
+      </p:nvGrpSpPr>
+      <p:grpSpPr>
+        <a:xfrm>
+          <a:off x="0" y="0"/>
+          <a:ext cx="0" cy="0"/>
+          <a:chOff x="0" y="0"/>
+          <a:chExt cx="0" cy="0"/>
+        </a:xfrm>
+      </p:grpSpPr>
       <p:pic>
         <p:nvPicPr>
           <p:cNvPr id="11" name="Picture 10">
@@ -5284,130 +6121,8 @@
   </p:clrMapOvr>
   <mc:AlternateContent xmlns:mc="http://schemas.openxmlformats.org/markup-compatibility/2006">
     <mc:Choice xmlns:p15="http://schemas.microsoft.com/office/powerpoint/2012/main" Requires="p15">
-      <p:transition xmlns:p14="http://schemas.microsoft.com/office/powerpoint/2010/main" spd="slow" p14:dur="1250">
+      <p:transition spd="slow">
         <p15:prstTrans prst="pageCurlDouble"/>
-      </p:transition>
-    </mc:Choice>
-    <mc:Fallback>
-      <p:transition spd="slow">
-        <p:fade/>
-      </p:transition>
-    </mc:Fallback>
-  </mc:AlternateContent>
-</p:sld>
-</file>
-
-<file path=ppt/slides/slide5.xml><?xml version="1.0" encoding="utf-8"?>
-<p:sld xmlns:a="http://schemas.openxmlformats.org/drawingml/2006/main" xmlns:r="http://schemas.openxmlformats.org/officeDocument/2006/relationships" xmlns:p="http://schemas.openxmlformats.org/presentationml/2006/main">
-  <p:cSld>
-    <p:spTree>
-      <p:nvGrpSpPr>
-        <p:cNvPr id="1" name=""/>
-        <p:cNvGrpSpPr/>
-        <p:nvPr/>
-      </p:nvGrpSpPr>
-      <p:grpSpPr>
-        <a:xfrm>
-          <a:off x="0" y="0"/>
-          <a:ext cx="0" cy="0"/>
-          <a:chOff x="0" y="0"/>
-          <a:chExt cx="0" cy="0"/>
-        </a:xfrm>
-      </p:grpSpPr>
-      <p:sp>
-        <p:nvSpPr>
-          <p:cNvPr id="2" name="Title 1">
-            <a:extLst>
-              <a:ext uri="{FF2B5EF4-FFF2-40B4-BE49-F238E27FC236}">
-                <a16:creationId xmlns:a16="http://schemas.microsoft.com/office/drawing/2014/main" id="{17A9E2DB-521B-43DF-9E58-56F350967A9F}"/>
-              </a:ext>
-            </a:extLst>
-          </p:cNvPr>
-          <p:cNvSpPr>
-            <a:spLocks noGrp="1"/>
-          </p:cNvSpPr>
-          <p:nvPr>
-            <p:ph type="title"/>
-          </p:nvPr>
-        </p:nvSpPr>
-        <p:spPr/>
-        <p:txBody>
-          <a:bodyPr/>
-          <a:lstStyle/>
-          <a:p>
-            <a:endParaRPr lang="en-IN"/>
-          </a:p>
-        </p:txBody>
-      </p:sp>
-      <p:sp>
-        <p:nvSpPr>
-          <p:cNvPr id="3" name="Content Placeholder 2">
-            <a:extLst>
-              <a:ext uri="{FF2B5EF4-FFF2-40B4-BE49-F238E27FC236}">
-                <a16:creationId xmlns:a16="http://schemas.microsoft.com/office/drawing/2014/main" id="{E822BFFF-9BD2-4522-86E4-CD458DB5FE02}"/>
-              </a:ext>
-            </a:extLst>
-          </p:cNvPr>
-          <p:cNvSpPr>
-            <a:spLocks noGrp="1"/>
-          </p:cNvSpPr>
-          <p:nvPr>
-            <p:ph idx="1"/>
-          </p:nvPr>
-        </p:nvSpPr>
-        <p:spPr/>
-        <p:txBody>
-          <a:bodyPr/>
-          <a:lstStyle/>
-          <a:p>
-            <a:endParaRPr lang="en-IN"/>
-          </a:p>
-        </p:txBody>
-      </p:sp>
-      <p:pic>
-        <p:nvPicPr>
-          <p:cNvPr id="15" name="Picture 14">
-            <a:extLst>
-              <a:ext uri="{FF2B5EF4-FFF2-40B4-BE49-F238E27FC236}">
-                <a16:creationId xmlns:a16="http://schemas.microsoft.com/office/drawing/2014/main" id="{E1548F89-872B-46F5-949E-D55EAC3F8190}"/>
-              </a:ext>
-            </a:extLst>
-          </p:cNvPr>
-          <p:cNvPicPr>
-            <a:picLocks noChangeAspect="1"/>
-          </p:cNvPicPr>
-          <p:nvPr/>
-        </p:nvPicPr>
-        <p:blipFill>
-          <a:blip r:embed="rId2"/>
-          <a:stretch>
-            <a:fillRect/>
-          </a:stretch>
-        </p:blipFill>
-        <p:spPr>
-          <a:xfrm>
-            <a:off x="0" y="2265668"/>
-            <a:ext cx="12192000" cy="2326664"/>
-          </a:xfrm>
-          <a:prstGeom prst="rect">
-            <a:avLst/>
-          </a:prstGeom>
-        </p:spPr>
-      </p:pic>
-    </p:spTree>
-    <p:extLst>
-      <p:ext uri="{BB962C8B-B14F-4D97-AF65-F5344CB8AC3E}">
-        <p14:creationId xmlns:p14="http://schemas.microsoft.com/office/powerpoint/2010/main" val="1184706176"/>
-      </p:ext>
-    </p:extLst>
-  </p:cSld>
-  <p:clrMapOvr>
-    <a:masterClrMapping/>
-  </p:clrMapOvr>
-  <mc:AlternateContent xmlns:mc="http://schemas.openxmlformats.org/markup-compatibility/2006">
-    <mc:Choice xmlns:p15="http://schemas.microsoft.com/office/powerpoint/2012/main" Requires="p15">
-      <p:transition xmlns:p14="http://schemas.microsoft.com/office/powerpoint/2010/main" spd="slow" p14:dur="1250">
-        <p15:prstTrans prst="pageCurlDouble" invX="1"/>
       </p:transition>
     </mc:Choice>
     <mc:Fallback>
@@ -5436,31 +6151,78 @@
           <a:chExt cx="0" cy="0"/>
         </a:xfrm>
       </p:grpSpPr>
-      <p:sp>
-        <p:nvSpPr>
-          <p:cNvPr id="2" name="Title 1">
-            <a:extLst>
-              <a:ext uri="{FF2B5EF4-FFF2-40B4-BE49-F238E27FC236}">
-                <a16:creationId xmlns:a16="http://schemas.microsoft.com/office/drawing/2014/main" id="{F27D23A6-4697-4E7E-9FE6-43C2008D3C80}"/>
-              </a:ext>
-            </a:extLst>
-          </p:cNvPr>
-          <p:cNvSpPr>
-            <a:spLocks noGrp="1"/>
-          </p:cNvSpPr>
-          <p:nvPr>
-            <p:ph type="title"/>
-          </p:nvPr>
-        </p:nvSpPr>
-        <p:spPr/>
-        <p:txBody>
-          <a:bodyPr/>
-          <a:lstStyle/>
-          <a:p>
-            <a:endParaRPr lang="en-IN"/>
-          </a:p>
-        </p:txBody>
-      </p:sp>
+      <p:pic>
+        <p:nvPicPr>
+          <p:cNvPr id="15" name="Picture 14">
+            <a:extLst>
+              <a:ext uri="{FF2B5EF4-FFF2-40B4-BE49-F238E27FC236}">
+                <a16:creationId xmlns:a16="http://schemas.microsoft.com/office/drawing/2014/main" id="{E1548F89-872B-46F5-949E-D55EAC3F8190}"/>
+              </a:ext>
+            </a:extLst>
+          </p:cNvPr>
+          <p:cNvPicPr>
+            <a:picLocks noChangeAspect="1"/>
+          </p:cNvPicPr>
+          <p:nvPr/>
+        </p:nvPicPr>
+        <p:blipFill>
+          <a:blip r:embed="rId2"/>
+          <a:stretch>
+            <a:fillRect/>
+          </a:stretch>
+        </p:blipFill>
+        <p:spPr>
+          <a:xfrm>
+            <a:off x="-1684479" y="1944209"/>
+            <a:ext cx="16095937" cy="3071673"/>
+          </a:xfrm>
+          <a:prstGeom prst="rect">
+            <a:avLst/>
+          </a:prstGeom>
+        </p:spPr>
+      </p:pic>
+    </p:spTree>
+    <p:extLst>
+      <p:ext uri="{BB962C8B-B14F-4D97-AF65-F5344CB8AC3E}">
+        <p14:creationId xmlns:p14="http://schemas.microsoft.com/office/powerpoint/2010/main" val="1184706176"/>
+      </p:ext>
+    </p:extLst>
+  </p:cSld>
+  <p:clrMapOvr>
+    <a:masterClrMapping/>
+  </p:clrMapOvr>
+  <mc:AlternateContent xmlns:mc="http://schemas.openxmlformats.org/markup-compatibility/2006">
+    <mc:Choice xmlns:p15="http://schemas.microsoft.com/office/powerpoint/2012/main" Requires="p15">
+      <p:transition spd="slow">
+        <p15:prstTrans prst="pageCurlDouble" invX="1"/>
+      </p:transition>
+    </mc:Choice>
+    <mc:Fallback>
+      <p:transition spd="slow">
+        <p:fade/>
+      </p:transition>
+    </mc:Fallback>
+  </mc:AlternateContent>
+</p:sld>
+</file>
+
+<file path=ppt/slides/slide7.xml><?xml version="1.0" encoding="utf-8"?>
+<p:sld xmlns:a="http://schemas.openxmlformats.org/drawingml/2006/main" xmlns:r="http://schemas.openxmlformats.org/officeDocument/2006/relationships" xmlns:p="http://schemas.openxmlformats.org/presentationml/2006/main">
+  <p:cSld>
+    <p:spTree>
+      <p:nvGrpSpPr>
+        <p:cNvPr id="1" name=""/>
+        <p:cNvGrpSpPr/>
+        <p:nvPr/>
+      </p:nvGrpSpPr>
+      <p:grpSpPr>
+        <a:xfrm>
+          <a:off x="0" y="0"/>
+          <a:ext cx="0" cy="0"/>
+          <a:chOff x="0" y="0"/>
+          <a:chExt cx="0" cy="0"/>
+        </a:xfrm>
+      </p:grpSpPr>
       <p:sp>
         <p:nvSpPr>
           <p:cNvPr id="3" name="Content Placeholder 2">
@@ -5528,130 +6290,8 @@
   </p:clrMapOvr>
   <mc:AlternateContent xmlns:mc="http://schemas.openxmlformats.org/markup-compatibility/2006">
     <mc:Choice xmlns:p15="http://schemas.microsoft.com/office/powerpoint/2012/main" Requires="p15">
-      <p:transition xmlns:p14="http://schemas.microsoft.com/office/powerpoint/2010/main" spd="slow" p14:dur="1250">
+      <p:transition spd="slow">
         <p15:prstTrans prst="pageCurlDouble"/>
-      </p:transition>
-    </mc:Choice>
-    <mc:Fallback>
-      <p:transition spd="slow">
-        <p:fade/>
-      </p:transition>
-    </mc:Fallback>
-  </mc:AlternateContent>
-</p:sld>
-</file>
-
-<file path=ppt/slides/slide7.xml><?xml version="1.0" encoding="utf-8"?>
-<p:sld xmlns:a="http://schemas.openxmlformats.org/drawingml/2006/main" xmlns:r="http://schemas.openxmlformats.org/officeDocument/2006/relationships" xmlns:p="http://schemas.openxmlformats.org/presentationml/2006/main">
-  <p:cSld>
-    <p:spTree>
-      <p:nvGrpSpPr>
-        <p:cNvPr id="1" name=""/>
-        <p:cNvGrpSpPr/>
-        <p:nvPr/>
-      </p:nvGrpSpPr>
-      <p:grpSpPr>
-        <a:xfrm>
-          <a:off x="0" y="0"/>
-          <a:ext cx="0" cy="0"/>
-          <a:chOff x="0" y="0"/>
-          <a:chExt cx="0" cy="0"/>
-        </a:xfrm>
-      </p:grpSpPr>
-      <p:sp>
-        <p:nvSpPr>
-          <p:cNvPr id="2" name="Title 1">
-            <a:extLst>
-              <a:ext uri="{FF2B5EF4-FFF2-40B4-BE49-F238E27FC236}">
-                <a16:creationId xmlns:a16="http://schemas.microsoft.com/office/drawing/2014/main" id="{D30327F3-C8BC-429E-9EF0-1ADF3DD29477}"/>
-              </a:ext>
-            </a:extLst>
-          </p:cNvPr>
-          <p:cNvSpPr>
-            <a:spLocks noGrp="1"/>
-          </p:cNvSpPr>
-          <p:nvPr>
-            <p:ph type="title"/>
-          </p:nvPr>
-        </p:nvSpPr>
-        <p:spPr/>
-        <p:txBody>
-          <a:bodyPr/>
-          <a:lstStyle/>
-          <a:p>
-            <a:endParaRPr lang="en-IN"/>
-          </a:p>
-        </p:txBody>
-      </p:sp>
-      <p:sp>
-        <p:nvSpPr>
-          <p:cNvPr id="3" name="Content Placeholder 2">
-            <a:extLst>
-              <a:ext uri="{FF2B5EF4-FFF2-40B4-BE49-F238E27FC236}">
-                <a16:creationId xmlns:a16="http://schemas.microsoft.com/office/drawing/2014/main" id="{7030A9FB-2F7C-463D-B19E-D7A7B622D21C}"/>
-              </a:ext>
-            </a:extLst>
-          </p:cNvPr>
-          <p:cNvSpPr>
-            <a:spLocks noGrp="1"/>
-          </p:cNvSpPr>
-          <p:nvPr>
-            <p:ph idx="1"/>
-          </p:nvPr>
-        </p:nvSpPr>
-        <p:spPr/>
-        <p:txBody>
-          <a:bodyPr/>
-          <a:lstStyle/>
-          <a:p>
-            <a:endParaRPr lang="en-IN"/>
-          </a:p>
-        </p:txBody>
-      </p:sp>
-      <p:pic>
-        <p:nvPicPr>
-          <p:cNvPr id="7" name="Picture 6">
-            <a:extLst>
-              <a:ext uri="{FF2B5EF4-FFF2-40B4-BE49-F238E27FC236}">
-                <a16:creationId xmlns:a16="http://schemas.microsoft.com/office/drawing/2014/main" id="{0A840701-AA98-4142-AD2F-2975FB498CE3}"/>
-              </a:ext>
-            </a:extLst>
-          </p:cNvPr>
-          <p:cNvPicPr>
-            <a:picLocks noChangeAspect="1"/>
-          </p:cNvPicPr>
-          <p:nvPr/>
-        </p:nvPicPr>
-        <p:blipFill>
-          <a:blip r:embed="rId2"/>
-          <a:stretch>
-            <a:fillRect/>
-          </a:stretch>
-        </p:blipFill>
-        <p:spPr>
-          <a:xfrm>
-            <a:off x="0" y="1731738"/>
-            <a:ext cx="12192000" cy="3394524"/>
-          </a:xfrm>
-          <a:prstGeom prst="rect">
-            <a:avLst/>
-          </a:prstGeom>
-        </p:spPr>
-      </p:pic>
-    </p:spTree>
-    <p:extLst>
-      <p:ext uri="{BB962C8B-B14F-4D97-AF65-F5344CB8AC3E}">
-        <p14:creationId xmlns:p14="http://schemas.microsoft.com/office/powerpoint/2010/main" val="2972681345"/>
-      </p:ext>
-    </p:extLst>
-  </p:cSld>
-  <p:clrMapOvr>
-    <a:masterClrMapping/>
-  </p:clrMapOvr>
-  <mc:AlternateContent xmlns:mc="http://schemas.openxmlformats.org/markup-compatibility/2006">
-    <mc:Choice xmlns:p15="http://schemas.microsoft.com/office/powerpoint/2012/main" Requires="p15">
-      <p:transition xmlns:p14="http://schemas.microsoft.com/office/powerpoint/2010/main" spd="slow" p14:dur="1250">
-        <p15:prstTrans prst="pageCurlDouble" invX="1"/>
       </p:transition>
     </mc:Choice>
     <mc:Fallback>
@@ -5680,154 +6320,30 @@
           <a:chExt cx="0" cy="0"/>
         </a:xfrm>
       </p:grpSpPr>
-      <p:sp>
-        <p:nvSpPr>
-          <p:cNvPr id="2" name="Title 1">
-            <a:extLst>
-              <a:ext uri="{FF2B5EF4-FFF2-40B4-BE49-F238E27FC236}">
-                <a16:creationId xmlns:a16="http://schemas.microsoft.com/office/drawing/2014/main" id="{48082732-8627-4FF2-9C47-CBA634C6785E}"/>
-              </a:ext>
-            </a:extLst>
-          </p:cNvPr>
-          <p:cNvSpPr>
-            <a:spLocks noGrp="1"/>
-          </p:cNvSpPr>
-          <p:nvPr>
-            <p:ph type="title"/>
-          </p:nvPr>
-        </p:nvSpPr>
-        <p:spPr/>
-        <p:txBody>
-          <a:bodyPr/>
-          <a:lstStyle/>
-          <a:p>
-            <a:endParaRPr lang="en-IN"/>
-          </a:p>
-        </p:txBody>
-      </p:sp>
       <p:pic>
         <p:nvPicPr>
-          <p:cNvPr id="13" name="Content Placeholder 12">
-            <a:extLst>
-              <a:ext uri="{FF2B5EF4-FFF2-40B4-BE49-F238E27FC236}">
-                <a16:creationId xmlns:a16="http://schemas.microsoft.com/office/drawing/2014/main" id="{339D9739-ACB4-400B-8171-88901A9956C0}"/>
+          <p:cNvPr id="7" name="Picture 6">
+            <a:extLst>
+              <a:ext uri="{FF2B5EF4-FFF2-40B4-BE49-F238E27FC236}">
+                <a16:creationId xmlns:a16="http://schemas.microsoft.com/office/drawing/2014/main" id="{0A840701-AA98-4142-AD2F-2975FB498CE3}"/>
               </a:ext>
             </a:extLst>
           </p:cNvPr>
           <p:cNvPicPr>
-            <a:picLocks noGrp="1" noChangeAspect="1"/>
+            <a:picLocks noChangeAspect="1"/>
           </p:cNvPicPr>
-          <p:nvPr>
-            <p:ph idx="1"/>
-          </p:nvPr>
+          <p:nvPr/>
         </p:nvPicPr>
         <p:blipFill>
-          <a:blip r:embed="rId2">
-            <a:extLst>
-              <a:ext uri="{28A0092B-C50C-407E-A947-70E740481C1C}">
-                <a14:useLocalDpi xmlns:a14="http://schemas.microsoft.com/office/drawing/2010/main" val="0"/>
-              </a:ext>
-            </a:extLst>
-          </a:blip>
+          <a:blip r:embed="rId2"/>
           <a:stretch>
             <a:fillRect/>
           </a:stretch>
         </p:blipFill>
         <p:spPr>
           <a:xfrm>
-            <a:off x="9105900" y="551605"/>
-            <a:ext cx="1848469" cy="2584969"/>
-          </a:xfrm>
-        </p:spPr>
-      </p:pic>
-      <p:pic>
-        <p:nvPicPr>
-          <p:cNvPr id="11" name="Picture 10">
-            <a:extLst>
-              <a:ext uri="{FF2B5EF4-FFF2-40B4-BE49-F238E27FC236}">
-                <a16:creationId xmlns:a16="http://schemas.microsoft.com/office/drawing/2014/main" id="{E8FC1E5F-1375-499D-8B16-6A30B4E71A18}"/>
-              </a:ext>
-            </a:extLst>
-          </p:cNvPr>
-          <p:cNvPicPr>
-            <a:picLocks noChangeAspect="1"/>
-          </p:cNvPicPr>
-          <p:nvPr/>
-        </p:nvPicPr>
-        <p:blipFill rotWithShape="1">
-          <a:blip r:embed="rId3"/>
-          <a:srcRect r="32188"/>
-          <a:stretch/>
-        </p:blipFill>
-        <p:spPr>
-          <a:xfrm>
-            <a:off x="0" y="-245150"/>
-            <a:ext cx="8267700" cy="3606682"/>
-          </a:xfrm>
-          <a:prstGeom prst="rect">
-            <a:avLst/>
-          </a:prstGeom>
-        </p:spPr>
-      </p:pic>
-      <p:pic>
-        <p:nvPicPr>
-          <p:cNvPr id="9" name="Picture 8">
-            <a:extLst>
-              <a:ext uri="{FF2B5EF4-FFF2-40B4-BE49-F238E27FC236}">
-                <a16:creationId xmlns:a16="http://schemas.microsoft.com/office/drawing/2014/main" id="{BF505A45-A132-4903-8C64-0936A07B0880}"/>
-              </a:ext>
-            </a:extLst>
-          </p:cNvPr>
-          <p:cNvPicPr>
-            <a:picLocks noChangeAspect="1"/>
-          </p:cNvPicPr>
-          <p:nvPr/>
-        </p:nvPicPr>
-        <p:blipFill rotWithShape="1">
-          <a:blip r:embed="rId4"/>
-          <a:srcRect l="27604"/>
-          <a:stretch/>
-        </p:blipFill>
-        <p:spPr>
-          <a:xfrm>
-            <a:off x="3365500" y="3361532"/>
-            <a:ext cx="8826500" cy="3613754"/>
-          </a:xfrm>
-          <a:prstGeom prst="rect">
-            <a:avLst/>
-          </a:prstGeom>
-        </p:spPr>
-      </p:pic>
-      <p:pic>
-        <p:nvPicPr>
-          <p:cNvPr id="15" name="Picture 14">
-            <a:extLst>
-              <a:ext uri="{FF2B5EF4-FFF2-40B4-BE49-F238E27FC236}">
-                <a16:creationId xmlns:a16="http://schemas.microsoft.com/office/drawing/2014/main" id="{FBBC7802-2068-45FB-A421-23C4600E326D}"/>
-              </a:ext>
-            </a:extLst>
-          </p:cNvPr>
-          <p:cNvPicPr>
-            <a:picLocks noChangeAspect="1"/>
-          </p:cNvPicPr>
-          <p:nvPr/>
-        </p:nvPicPr>
-        <p:blipFill>
-          <a:blip r:embed="rId5">
-            <a:extLst>
-              <a:ext uri="{28A0092B-C50C-407E-A947-70E740481C1C}">
-                <a14:useLocalDpi xmlns:a14="http://schemas.microsoft.com/office/drawing/2010/main" val="0"/>
-              </a:ext>
-            </a:extLst>
-          </a:blip>
-          <a:stretch>
-            <a:fillRect/>
-          </a:stretch>
-        </p:blipFill>
-        <p:spPr>
-          <a:xfrm>
-            <a:off x="838200" y="3283075"/>
-            <a:ext cx="2222500" cy="3110199"/>
+            <a:off x="-1099620" y="1351625"/>
+            <a:ext cx="14922475" cy="4154749"/>
           </a:xfrm>
           <a:prstGeom prst="rect">
             <a:avLst/>
@@ -5837,7 +6353,7 @@
     </p:spTree>
     <p:extLst>
       <p:ext uri="{BB962C8B-B14F-4D97-AF65-F5344CB8AC3E}">
-        <p14:creationId xmlns:p14="http://schemas.microsoft.com/office/powerpoint/2010/main" val="3179520583"/>
+        <p14:creationId xmlns:p14="http://schemas.microsoft.com/office/powerpoint/2010/main" val="2972681345"/>
       </p:ext>
     </p:extLst>
   </p:cSld>
@@ -5846,8 +6362,8 @@
   </p:clrMapOvr>
   <mc:AlternateContent xmlns:mc="http://schemas.openxmlformats.org/markup-compatibility/2006">
     <mc:Choice xmlns:p15="http://schemas.microsoft.com/office/powerpoint/2012/main" Requires="p15">
-      <p:transition xmlns:p14="http://schemas.microsoft.com/office/powerpoint/2010/main" spd="slow" p14:dur="1250">
-        <p15:prstTrans prst="pageCurlDouble"/>
+      <p:transition spd="slow">
+        <p15:prstTrans prst="pageCurlDouble" invX="1"/>
       </p:transition>
     </mc:Choice>
     <mc:Fallback>
@@ -5876,62 +6392,105 @@
           <a:chExt cx="0" cy="0"/>
         </a:xfrm>
       </p:grpSpPr>
-      <p:sp>
-        <p:nvSpPr>
-          <p:cNvPr id="2" name="Title 1">
-            <a:extLst>
-              <a:ext uri="{FF2B5EF4-FFF2-40B4-BE49-F238E27FC236}">
-                <a16:creationId xmlns:a16="http://schemas.microsoft.com/office/drawing/2014/main" id="{1622854E-DDEB-492B-B0F1-77C1848F9E89}"/>
-              </a:ext>
-            </a:extLst>
-          </p:cNvPr>
-          <p:cNvSpPr>
-            <a:spLocks noGrp="1"/>
-          </p:cNvSpPr>
-          <p:nvPr>
-            <p:ph type="title"/>
-          </p:nvPr>
-        </p:nvSpPr>
-        <p:spPr/>
-        <p:txBody>
-          <a:bodyPr/>
-          <a:lstStyle/>
-          <a:p>
-            <a:endParaRPr lang="en-IN"/>
-          </a:p>
-        </p:txBody>
-      </p:sp>
-      <p:sp>
-        <p:nvSpPr>
-          <p:cNvPr id="3" name="Content Placeholder 2">
-            <a:extLst>
-              <a:ext uri="{FF2B5EF4-FFF2-40B4-BE49-F238E27FC236}">
-                <a16:creationId xmlns:a16="http://schemas.microsoft.com/office/drawing/2014/main" id="{459DAD8A-6B78-4158-AB0C-69D6A165D93D}"/>
-              </a:ext>
-            </a:extLst>
-          </p:cNvPr>
-          <p:cNvSpPr>
-            <a:spLocks noGrp="1"/>
-          </p:cNvSpPr>
-          <p:nvPr>
-            <p:ph idx="1"/>
-          </p:nvPr>
-        </p:nvSpPr>
-        <p:spPr/>
-        <p:txBody>
-          <a:bodyPr/>
-          <a:lstStyle/>
-          <a:p>
-            <a:endParaRPr lang="en-IN"/>
-          </a:p>
-        </p:txBody>
-      </p:sp>
       <p:pic>
         <p:nvPicPr>
-          <p:cNvPr id="7" name="Picture 6">
-            <a:extLst>
-              <a:ext uri="{FF2B5EF4-FFF2-40B4-BE49-F238E27FC236}">
-                <a16:creationId xmlns:a16="http://schemas.microsoft.com/office/drawing/2014/main" id="{D949D581-E5DC-405F-A4D2-69422BBD3C45}"/>
+          <p:cNvPr id="13" name="Content Placeholder 12">
+            <a:extLst>
+              <a:ext uri="{FF2B5EF4-FFF2-40B4-BE49-F238E27FC236}">
+                <a16:creationId xmlns:a16="http://schemas.microsoft.com/office/drawing/2014/main" id="{339D9739-ACB4-400B-8171-88901A9956C0}"/>
+              </a:ext>
+            </a:extLst>
+          </p:cNvPr>
+          <p:cNvPicPr>
+            <a:picLocks noGrp="1" noChangeAspect="1"/>
+          </p:cNvPicPr>
+          <p:nvPr>
+            <p:ph idx="1"/>
+          </p:nvPr>
+        </p:nvPicPr>
+        <p:blipFill>
+          <a:blip r:embed="rId2">
+            <a:extLst>
+              <a:ext uri="{28A0092B-C50C-407E-A947-70E740481C1C}">
+                <a14:useLocalDpi xmlns:a14="http://schemas.microsoft.com/office/drawing/2010/main" val="0"/>
+              </a:ext>
+            </a:extLst>
+          </a:blip>
+          <a:stretch>
+            <a:fillRect/>
+          </a:stretch>
+        </p:blipFill>
+        <p:spPr>
+          <a:xfrm>
+            <a:off x="9105900" y="551605"/>
+            <a:ext cx="1848469" cy="2584969"/>
+          </a:xfrm>
+        </p:spPr>
+      </p:pic>
+      <p:pic>
+        <p:nvPicPr>
+          <p:cNvPr id="11" name="Picture 10">
+            <a:extLst>
+              <a:ext uri="{FF2B5EF4-FFF2-40B4-BE49-F238E27FC236}">
+                <a16:creationId xmlns:a16="http://schemas.microsoft.com/office/drawing/2014/main" id="{E8FC1E5F-1375-499D-8B16-6A30B4E71A18}"/>
+              </a:ext>
+            </a:extLst>
+          </p:cNvPr>
+          <p:cNvPicPr>
+            <a:picLocks noChangeAspect="1"/>
+          </p:cNvPicPr>
+          <p:nvPr/>
+        </p:nvPicPr>
+        <p:blipFill rotWithShape="1">
+          <a:blip r:embed="rId3"/>
+          <a:srcRect r="32188"/>
+          <a:stretch/>
+        </p:blipFill>
+        <p:spPr>
+          <a:xfrm>
+            <a:off x="0" y="0"/>
+            <a:ext cx="8267700" cy="3606682"/>
+          </a:xfrm>
+          <a:prstGeom prst="rect">
+            <a:avLst/>
+          </a:prstGeom>
+        </p:spPr>
+      </p:pic>
+      <p:pic>
+        <p:nvPicPr>
+          <p:cNvPr id="9" name="Picture 8">
+            <a:extLst>
+              <a:ext uri="{FF2B5EF4-FFF2-40B4-BE49-F238E27FC236}">
+                <a16:creationId xmlns:a16="http://schemas.microsoft.com/office/drawing/2014/main" id="{BF505A45-A132-4903-8C64-0936A07B0880}"/>
+              </a:ext>
+            </a:extLst>
+          </p:cNvPr>
+          <p:cNvPicPr>
+            <a:picLocks noChangeAspect="1"/>
+          </p:cNvPicPr>
+          <p:nvPr/>
+        </p:nvPicPr>
+        <p:blipFill rotWithShape="1">
+          <a:blip r:embed="rId4"/>
+          <a:srcRect l="27604"/>
+          <a:stretch/>
+        </p:blipFill>
+        <p:spPr>
+          <a:xfrm>
+            <a:off x="3365500" y="3244246"/>
+            <a:ext cx="8826500" cy="3613754"/>
+          </a:xfrm>
+          <a:prstGeom prst="rect">
+            <a:avLst/>
+          </a:prstGeom>
+        </p:spPr>
+      </p:pic>
+      <p:pic>
+        <p:nvPicPr>
+          <p:cNvPr id="15" name="Picture 14">
+            <a:extLst>
+              <a:ext uri="{FF2B5EF4-FFF2-40B4-BE49-F238E27FC236}">
+                <a16:creationId xmlns:a16="http://schemas.microsoft.com/office/drawing/2014/main" id="{FBBC7802-2068-45FB-A421-23C4600E326D}"/>
               </a:ext>
             </a:extLst>
           </p:cNvPr>
@@ -5941,15 +6500,21 @@
           <p:nvPr/>
         </p:nvPicPr>
         <p:blipFill>
-          <a:blip r:embed="rId2"/>
+          <a:blip r:embed="rId5">
+            <a:extLst>
+              <a:ext uri="{28A0092B-C50C-407E-A947-70E740481C1C}">
+                <a14:useLocalDpi xmlns:a14="http://schemas.microsoft.com/office/drawing/2010/main" val="0"/>
+              </a:ext>
+            </a:extLst>
+          </a:blip>
           <a:stretch>
             <a:fillRect/>
           </a:stretch>
         </p:blipFill>
         <p:spPr>
           <a:xfrm>
-            <a:off x="0" y="2074726"/>
-            <a:ext cx="12192000" cy="2708548"/>
+            <a:off x="838200" y="3283075"/>
+            <a:ext cx="2222500" cy="3110199"/>
           </a:xfrm>
           <a:prstGeom prst="rect">
             <a:avLst/>
@@ -5959,7 +6524,7 @@
     </p:spTree>
     <p:extLst>
       <p:ext uri="{BB962C8B-B14F-4D97-AF65-F5344CB8AC3E}">
-        <p14:creationId xmlns:p14="http://schemas.microsoft.com/office/powerpoint/2010/main" val="3731190441"/>
+        <p14:creationId xmlns:p14="http://schemas.microsoft.com/office/powerpoint/2010/main" val="3179520583"/>
       </p:ext>
     </p:extLst>
   </p:cSld>
@@ -5968,8 +6533,8 @@
   </p:clrMapOvr>
   <mc:AlternateContent xmlns:mc="http://schemas.openxmlformats.org/markup-compatibility/2006">
     <mc:Choice xmlns:p15="http://schemas.microsoft.com/office/powerpoint/2012/main" Requires="p15">
-      <p:transition xmlns:p14="http://schemas.microsoft.com/office/powerpoint/2010/main" spd="slow" p14:dur="1250">
-        <p15:prstTrans prst="pageCurlDouble" invX="1"/>
+      <p:transition spd="slow">
+        <p15:prstTrans prst="pageCurlDouble"/>
       </p:transition>
     </mc:Choice>
     <mc:Fallback>

--- a/SEM 6/$Mini Project/house-of-cards.pptx
+++ b/SEM 6/$Mini Project/house-of-cards.pptx
@@ -209,7 +209,7 @@
           <a:p>
             <a:fld id="{93439FC1-AF45-4C46-B480-B9C8F990B6EB}" type="datetimeFigureOut">
               <a:rPr lang="en-IN" smtClean="0"/>
-              <a:t>10-02-2026</a:t>
+              <a:t>29-04-2026</a:t>
             </a:fld>
             <a:endParaRPr lang="en-IN"/>
           </a:p>
@@ -990,7 +990,7 @@
           <a:p>
             <a:fld id="{C4095AA1-E3F7-4466-8625-D61421E070F6}" type="datetimeFigureOut">
               <a:rPr lang="en-IN" smtClean="0"/>
-              <a:t>10-02-2026</a:t>
+              <a:t>29-04-2026</a:t>
             </a:fld>
             <a:endParaRPr lang="en-IN"/>
           </a:p>
@@ -1060,13 +1060,13 @@
   <p:clrMapOvr>
     <a:masterClrMapping/>
   </p:clrMapOvr>
-  <mc:AlternateContent xmlns:mc="http://schemas.openxmlformats.org/markup-compatibility/2006">
-    <mc:Choice xmlns:p15="http://schemas.microsoft.com/office/powerpoint/2012/main" Requires="p15">
+  <mc:AlternateContent xmlns:mc="http://schemas.openxmlformats.org/markup-compatibility/2006" xmlns:p15="http://schemas.microsoft.com/office/powerpoint/2012/main">
+    <mc:Choice Requires="p15">
       <p:transition spd="slow">
         <p15:prstTrans prst="pageCurlSingle"/>
       </p:transition>
     </mc:Choice>
-    <mc:Fallback>
+    <mc:Fallback xmlns="">
       <p:transition spd="slow">
         <p:fade/>
       </p:transition>
@@ -1202,7 +1202,7 @@
           <a:p>
             <a:fld id="{C4095AA1-E3F7-4466-8625-D61421E070F6}" type="datetimeFigureOut">
               <a:rPr lang="en-IN" smtClean="0"/>
-              <a:t>10-02-2026</a:t>
+              <a:t>29-04-2026</a:t>
             </a:fld>
             <a:endParaRPr lang="en-IN"/>
           </a:p>
@@ -1272,13 +1272,13 @@
   <p:clrMapOvr>
     <a:masterClrMapping/>
   </p:clrMapOvr>
-  <mc:AlternateContent xmlns:mc="http://schemas.openxmlformats.org/markup-compatibility/2006">
-    <mc:Choice xmlns:p15="http://schemas.microsoft.com/office/powerpoint/2012/main" Requires="p15">
+  <mc:AlternateContent xmlns:mc="http://schemas.openxmlformats.org/markup-compatibility/2006" xmlns:p15="http://schemas.microsoft.com/office/powerpoint/2012/main">
+    <mc:Choice Requires="p15">
       <p:transition spd="slow">
         <p15:prstTrans prst="pageCurlSingle"/>
       </p:transition>
     </mc:Choice>
-    <mc:Fallback>
+    <mc:Fallback xmlns="">
       <p:transition spd="slow">
         <p:fade/>
       </p:transition>
@@ -1424,7 +1424,7 @@
           <a:p>
             <a:fld id="{C4095AA1-E3F7-4466-8625-D61421E070F6}" type="datetimeFigureOut">
               <a:rPr lang="en-IN" smtClean="0"/>
-              <a:t>10-02-2026</a:t>
+              <a:t>29-04-2026</a:t>
             </a:fld>
             <a:endParaRPr lang="en-IN"/>
           </a:p>
@@ -1494,13 +1494,13 @@
   <p:clrMapOvr>
     <a:masterClrMapping/>
   </p:clrMapOvr>
-  <mc:AlternateContent xmlns:mc="http://schemas.openxmlformats.org/markup-compatibility/2006">
-    <mc:Choice xmlns:p15="http://schemas.microsoft.com/office/powerpoint/2012/main" Requires="p15">
+  <mc:AlternateContent xmlns:mc="http://schemas.openxmlformats.org/markup-compatibility/2006" xmlns:p15="http://schemas.microsoft.com/office/powerpoint/2012/main">
+    <mc:Choice Requires="p15">
       <p:transition spd="slow">
         <p15:prstTrans prst="pageCurlSingle"/>
       </p:transition>
     </mc:Choice>
-    <mc:Fallback>
+    <mc:Fallback xmlns="">
       <p:transition spd="slow">
         <p:fade/>
       </p:transition>
@@ -1636,7 +1636,7 @@
           <a:p>
             <a:fld id="{C4095AA1-E3F7-4466-8625-D61421E070F6}" type="datetimeFigureOut">
               <a:rPr lang="en-IN" smtClean="0"/>
-              <a:t>10-02-2026</a:t>
+              <a:t>29-04-2026</a:t>
             </a:fld>
             <a:endParaRPr lang="en-IN"/>
           </a:p>
@@ -1706,13 +1706,13 @@
   <p:clrMapOvr>
     <a:masterClrMapping/>
   </p:clrMapOvr>
-  <mc:AlternateContent xmlns:mc="http://schemas.openxmlformats.org/markup-compatibility/2006">
-    <mc:Choice xmlns:p15="http://schemas.microsoft.com/office/powerpoint/2012/main" Requires="p15">
+  <mc:AlternateContent xmlns:mc="http://schemas.openxmlformats.org/markup-compatibility/2006" xmlns:p15="http://schemas.microsoft.com/office/powerpoint/2012/main">
+    <mc:Choice Requires="p15">
       <p:transition spd="slow">
         <p15:prstTrans prst="pageCurlSingle"/>
       </p:transition>
     </mc:Choice>
-    <mc:Fallback>
+    <mc:Fallback xmlns="">
       <p:transition spd="slow">
         <p:fade/>
       </p:transition>
@@ -1924,7 +1924,7 @@
           <a:p>
             <a:fld id="{C4095AA1-E3F7-4466-8625-D61421E070F6}" type="datetimeFigureOut">
               <a:rPr lang="en-IN" smtClean="0"/>
-              <a:t>10-02-2026</a:t>
+              <a:t>29-04-2026</a:t>
             </a:fld>
             <a:endParaRPr lang="en-IN"/>
           </a:p>
@@ -1994,13 +1994,13 @@
   <p:clrMapOvr>
     <a:masterClrMapping/>
   </p:clrMapOvr>
-  <mc:AlternateContent xmlns:mc="http://schemas.openxmlformats.org/markup-compatibility/2006">
-    <mc:Choice xmlns:p15="http://schemas.microsoft.com/office/powerpoint/2012/main" Requires="p15">
+  <mc:AlternateContent xmlns:mc="http://schemas.openxmlformats.org/markup-compatibility/2006" xmlns:p15="http://schemas.microsoft.com/office/powerpoint/2012/main">
+    <mc:Choice Requires="p15">
       <p:transition spd="slow">
         <p15:prstTrans prst="pageCurlSingle"/>
       </p:transition>
     </mc:Choice>
-    <mc:Fallback>
+    <mc:Fallback xmlns="">
       <p:transition spd="slow">
         <p:fade/>
       </p:transition>
@@ -2204,7 +2204,7 @@
           <a:p>
             <a:fld id="{C4095AA1-E3F7-4466-8625-D61421E070F6}" type="datetimeFigureOut">
               <a:rPr lang="en-IN" smtClean="0"/>
-              <a:t>10-02-2026</a:t>
+              <a:t>29-04-2026</a:t>
             </a:fld>
             <a:endParaRPr lang="en-IN"/>
           </a:p>
@@ -2274,13 +2274,13 @@
   <p:clrMapOvr>
     <a:masterClrMapping/>
   </p:clrMapOvr>
-  <mc:AlternateContent xmlns:mc="http://schemas.openxmlformats.org/markup-compatibility/2006">
-    <mc:Choice xmlns:p15="http://schemas.microsoft.com/office/powerpoint/2012/main" Requires="p15">
+  <mc:AlternateContent xmlns:mc="http://schemas.openxmlformats.org/markup-compatibility/2006" xmlns:p15="http://schemas.microsoft.com/office/powerpoint/2012/main">
+    <mc:Choice Requires="p15">
       <p:transition spd="slow">
         <p15:prstTrans prst="pageCurlSingle"/>
       </p:transition>
     </mc:Choice>
-    <mc:Fallback>
+    <mc:Fallback xmlns="">
       <p:transition spd="slow">
         <p:fade/>
       </p:transition>
@@ -2631,7 +2631,7 @@
           <a:p>
             <a:fld id="{C4095AA1-E3F7-4466-8625-D61421E070F6}" type="datetimeFigureOut">
               <a:rPr lang="en-IN" smtClean="0"/>
-              <a:t>10-02-2026</a:t>
+              <a:t>29-04-2026</a:t>
             </a:fld>
             <a:endParaRPr lang="en-IN"/>
           </a:p>
@@ -2701,13 +2701,13 @@
   <p:clrMapOvr>
     <a:masterClrMapping/>
   </p:clrMapOvr>
-  <mc:AlternateContent xmlns:mc="http://schemas.openxmlformats.org/markup-compatibility/2006">
-    <mc:Choice xmlns:p15="http://schemas.microsoft.com/office/powerpoint/2012/main" Requires="p15">
+  <mc:AlternateContent xmlns:mc="http://schemas.openxmlformats.org/markup-compatibility/2006" xmlns:p15="http://schemas.microsoft.com/office/powerpoint/2012/main">
+    <mc:Choice Requires="p15">
       <p:transition spd="slow">
         <p15:prstTrans prst="pageCurlSingle"/>
       </p:transition>
     </mc:Choice>
-    <mc:Fallback>
+    <mc:Fallback xmlns="">
       <p:transition spd="slow">
         <p:fade/>
       </p:transition>
@@ -2785,7 +2785,7 @@
           <a:p>
             <a:fld id="{C4095AA1-E3F7-4466-8625-D61421E070F6}" type="datetimeFigureOut">
               <a:rPr lang="en-IN" smtClean="0"/>
-              <a:t>10-02-2026</a:t>
+              <a:t>29-04-2026</a:t>
             </a:fld>
             <a:endParaRPr lang="en-IN"/>
           </a:p>
@@ -2855,13 +2855,13 @@
   <p:clrMapOvr>
     <a:masterClrMapping/>
   </p:clrMapOvr>
-  <mc:AlternateContent xmlns:mc="http://schemas.openxmlformats.org/markup-compatibility/2006">
-    <mc:Choice xmlns:p15="http://schemas.microsoft.com/office/powerpoint/2012/main" Requires="p15">
+  <mc:AlternateContent xmlns:mc="http://schemas.openxmlformats.org/markup-compatibility/2006" xmlns:p15="http://schemas.microsoft.com/office/powerpoint/2012/main">
+    <mc:Choice Requires="p15">
       <p:transition spd="slow">
         <p15:prstTrans prst="pageCurlSingle"/>
       </p:transition>
     </mc:Choice>
-    <mc:Fallback>
+    <mc:Fallback xmlns="">
       <p:transition spd="slow">
         <p:fade/>
       </p:transition>
@@ -2910,7 +2910,7 @@
           <a:p>
             <a:fld id="{C4095AA1-E3F7-4466-8625-D61421E070F6}" type="datetimeFigureOut">
               <a:rPr lang="en-IN" smtClean="0"/>
-              <a:t>10-02-2026</a:t>
+              <a:t>29-04-2026</a:t>
             </a:fld>
             <a:endParaRPr lang="en-IN"/>
           </a:p>
@@ -2980,13 +2980,13 @@
   <p:clrMapOvr>
     <a:masterClrMapping/>
   </p:clrMapOvr>
-  <mc:AlternateContent xmlns:mc="http://schemas.openxmlformats.org/markup-compatibility/2006">
-    <mc:Choice xmlns:p15="http://schemas.microsoft.com/office/powerpoint/2012/main" Requires="p15">
+  <mc:AlternateContent xmlns:mc="http://schemas.openxmlformats.org/markup-compatibility/2006" xmlns:p15="http://schemas.microsoft.com/office/powerpoint/2012/main">
+    <mc:Choice Requires="p15">
       <p:transition spd="slow">
         <p15:prstTrans prst="pageCurlSingle"/>
       </p:transition>
     </mc:Choice>
-    <mc:Fallback>
+    <mc:Fallback xmlns="">
       <p:transition spd="slow">
         <p:fade/>
       </p:transition>
@@ -3235,7 +3235,7 @@
           <a:p>
             <a:fld id="{C4095AA1-E3F7-4466-8625-D61421E070F6}" type="datetimeFigureOut">
               <a:rPr lang="en-IN" smtClean="0"/>
-              <a:t>10-02-2026</a:t>
+              <a:t>29-04-2026</a:t>
             </a:fld>
             <a:endParaRPr lang="en-IN"/>
           </a:p>
@@ -3305,13 +3305,13 @@
   <p:clrMapOvr>
     <a:masterClrMapping/>
   </p:clrMapOvr>
-  <mc:AlternateContent xmlns:mc="http://schemas.openxmlformats.org/markup-compatibility/2006">
-    <mc:Choice xmlns:p15="http://schemas.microsoft.com/office/powerpoint/2012/main" Requires="p15">
+  <mc:AlternateContent xmlns:mc="http://schemas.openxmlformats.org/markup-compatibility/2006" xmlns:p15="http://schemas.microsoft.com/office/powerpoint/2012/main">
+    <mc:Choice Requires="p15">
       <p:transition spd="slow">
         <p15:prstTrans prst="pageCurlSingle"/>
       </p:transition>
     </mc:Choice>
-    <mc:Fallback>
+    <mc:Fallback xmlns="">
       <p:transition spd="slow">
         <p:fade/>
       </p:transition>
@@ -3536,7 +3536,7 @@
           <a:p>
             <a:fld id="{C4095AA1-E3F7-4466-8625-D61421E070F6}" type="datetimeFigureOut">
               <a:rPr lang="en-IN" smtClean="0"/>
-              <a:t>10-02-2026</a:t>
+              <a:t>29-04-2026</a:t>
             </a:fld>
             <a:endParaRPr lang="en-IN"/>
           </a:p>
@@ -3606,13 +3606,13 @@
   <p:clrMapOvr>
     <a:masterClrMapping/>
   </p:clrMapOvr>
-  <mc:AlternateContent xmlns:mc="http://schemas.openxmlformats.org/markup-compatibility/2006">
-    <mc:Choice xmlns:p15="http://schemas.microsoft.com/office/powerpoint/2012/main" Requires="p15">
+  <mc:AlternateContent xmlns:mc="http://schemas.openxmlformats.org/markup-compatibility/2006" xmlns:p15="http://schemas.microsoft.com/office/powerpoint/2012/main">
+    <mc:Choice Requires="p15">
       <p:transition spd="slow">
         <p15:prstTrans prst="pageCurlSingle"/>
       </p:transition>
     </mc:Choice>
-    <mc:Fallback>
+    <mc:Fallback xmlns="">
       <p:transition spd="slow">
         <p:fade/>
       </p:transition>
@@ -3794,7 +3794,7 @@
           <a:p>
             <a:fld id="{C4095AA1-E3F7-4466-8625-D61421E070F6}" type="datetimeFigureOut">
               <a:rPr lang="en-IN" smtClean="0"/>
-              <a:t>10-02-2026</a:t>
+              <a:t>29-04-2026</a:t>
             </a:fld>
             <a:endParaRPr lang="en-IN"/>
           </a:p>
@@ -3911,13 +3911,13 @@
     <p:sldLayoutId id="2147483658" r:id="rId10"/>
     <p:sldLayoutId id="2147483659" r:id="rId11"/>
   </p:sldLayoutIdLst>
-  <mc:AlternateContent xmlns:mc="http://schemas.openxmlformats.org/markup-compatibility/2006">
-    <mc:Choice xmlns:p15="http://schemas.microsoft.com/office/powerpoint/2012/main" Requires="p15">
+  <mc:AlternateContent xmlns:mc="http://schemas.openxmlformats.org/markup-compatibility/2006" xmlns:p15="http://schemas.microsoft.com/office/powerpoint/2012/main">
+    <mc:Choice Requires="p15">
       <p:transition spd="slow">
         <p15:prstTrans prst="pageCurlSingle"/>
       </p:transition>
     </mc:Choice>
-    <mc:Fallback>
+    <mc:Fallback xmlns="">
       <p:transition spd="slow">
         <p:fade/>
       </p:transition>
@@ -4470,13 +4470,13 @@
   <p:clrMapOvr>
     <a:masterClrMapping/>
   </p:clrMapOvr>
-  <mc:AlternateContent xmlns:mc="http://schemas.openxmlformats.org/markup-compatibility/2006">
-    <mc:Choice xmlns:p15="http://schemas.microsoft.com/office/powerpoint/2012/main" Requires="p15">
+  <mc:AlternateContent xmlns:mc="http://schemas.openxmlformats.org/markup-compatibility/2006" xmlns:p15="http://schemas.microsoft.com/office/powerpoint/2012/main">
+    <mc:Choice Requires="p15">
       <p:transition spd="slow">
         <p15:prstTrans prst="pageCurlDouble"/>
       </p:transition>
     </mc:Choice>
-    <mc:Fallback>
+    <mc:Fallback xmlns="">
       <p:transition spd="slow">
         <p:fade/>
       </p:transition>
@@ -4542,13 +4542,13 @@
   <p:clrMapOvr>
     <a:masterClrMapping/>
   </p:clrMapOvr>
-  <mc:AlternateContent xmlns:mc="http://schemas.openxmlformats.org/markup-compatibility/2006">
-    <mc:Choice xmlns:p15="http://schemas.microsoft.com/office/powerpoint/2012/main" Requires="p15">
+  <mc:AlternateContent xmlns:mc="http://schemas.openxmlformats.org/markup-compatibility/2006" xmlns:p15="http://schemas.microsoft.com/office/powerpoint/2012/main">
+    <mc:Choice Requires="p15">
       <p:transition spd="slow">
         <p15:prstTrans prst="pageCurlDouble" invX="1"/>
       </p:transition>
     </mc:Choice>
-    <mc:Fallback>
+    <mc:Fallback xmlns="">
       <p:transition spd="slow">
         <p:fade/>
       </p:transition>
@@ -4614,13 +4614,13 @@
   <p:clrMapOvr>
     <a:masterClrMapping/>
   </p:clrMapOvr>
-  <mc:AlternateContent xmlns:mc="http://schemas.openxmlformats.org/markup-compatibility/2006">
-    <mc:Choice xmlns:p15="http://schemas.microsoft.com/office/powerpoint/2012/main" Requires="p15">
+  <mc:AlternateContent xmlns:mc="http://schemas.openxmlformats.org/markup-compatibility/2006" xmlns:p15="http://schemas.microsoft.com/office/powerpoint/2012/main">
+    <mc:Choice Requires="p15">
       <p:transition spd="slow">
         <p15:prstTrans prst="pageCurlDouble"/>
       </p:transition>
     </mc:Choice>
-    <mc:Fallback>
+    <mc:Fallback xmlns="">
       <p:transition spd="slow">
         <p:fade/>
       </p:transition>
@@ -5017,13 +5017,13 @@
   <p:clrMapOvr>
     <a:masterClrMapping/>
   </p:clrMapOvr>
-  <mc:AlternateContent xmlns:mc="http://schemas.openxmlformats.org/markup-compatibility/2006">
-    <mc:Choice xmlns:p15="http://schemas.microsoft.com/office/powerpoint/2012/main" Requires="p15">
+  <mc:AlternateContent xmlns:mc="http://schemas.openxmlformats.org/markup-compatibility/2006" xmlns:p15="http://schemas.microsoft.com/office/powerpoint/2012/main">
+    <mc:Choice Requires="p15">
       <p:transition spd="slow">
         <p15:prstTrans prst="pageCurlDouble" invX="1"/>
       </p:transition>
     </mc:Choice>
-    <mc:Fallback>
+    <mc:Fallback xmlns="">
       <p:transition spd="slow">
         <p:fade/>
       </p:transition>
@@ -5243,13 +5243,13 @@
   <p:clrMapOvr>
     <a:masterClrMapping/>
   </p:clrMapOvr>
-  <mc:AlternateContent xmlns:mc="http://schemas.openxmlformats.org/markup-compatibility/2006">
-    <mc:Choice xmlns:p15="http://schemas.microsoft.com/office/powerpoint/2012/main" Requires="p15">
+  <mc:AlternateContent xmlns:mc="http://schemas.openxmlformats.org/markup-compatibility/2006" xmlns:p15="http://schemas.microsoft.com/office/powerpoint/2012/main">
+    <mc:Choice Requires="p15">
       <p:transition spd="slow">
         <p15:prstTrans prst="pageCurlDouble"/>
       </p:transition>
     </mc:Choice>
-    <mc:Fallback>
+    <mc:Fallback xmlns="">
       <p:transition spd="slow">
         <p:fade/>
       </p:transition>
@@ -5709,13 +5709,13 @@
   <p:clrMapOvr>
     <a:masterClrMapping/>
   </p:clrMapOvr>
-  <mc:AlternateContent xmlns:mc="http://schemas.openxmlformats.org/markup-compatibility/2006">
-    <mc:Choice xmlns:p15="http://schemas.microsoft.com/office/powerpoint/2012/main" Requires="p15">
+  <mc:AlternateContent xmlns:mc="http://schemas.openxmlformats.org/markup-compatibility/2006" xmlns:p15="http://schemas.microsoft.com/office/powerpoint/2012/main">
+    <mc:Choice Requires="p15">
       <p:transition spd="slow">
         <p15:prstTrans prst="pageCurlDouble" invX="1"/>
       </p:transition>
     </mc:Choice>
-    <mc:Fallback>
+    <mc:Fallback xmlns="">
       <p:transition spd="slow">
         <p:fade/>
       </p:transition>
@@ -5926,13 +5926,13 @@
   <p:clrMapOvr>
     <a:masterClrMapping/>
   </p:clrMapOvr>
-  <mc:AlternateContent xmlns:mc="http://schemas.openxmlformats.org/markup-compatibility/2006">
-    <mc:Choice xmlns:p15="http://schemas.microsoft.com/office/powerpoint/2012/main" Requires="p15">
+  <mc:AlternateContent xmlns:mc="http://schemas.openxmlformats.org/markup-compatibility/2006" xmlns:p15="http://schemas.microsoft.com/office/powerpoint/2012/main">
+    <mc:Choice Requires="p15">
       <p:transition spd="slow">
         <p15:prstTrans prst="pageCurlDouble"/>
       </p:transition>
     </mc:Choice>
-    <mc:Fallback>
+    <mc:Fallback xmlns="">
       <p:transition spd="slow">
         <p:fade/>
       </p:transition>
@@ -6048,13 +6048,13 @@
   <p:clrMapOvr>
     <a:masterClrMapping/>
   </p:clrMapOvr>
-  <mc:AlternateContent xmlns:mc="http://schemas.openxmlformats.org/markup-compatibility/2006">
-    <mc:Choice xmlns:p15="http://schemas.microsoft.com/office/powerpoint/2012/main" Requires="p15">
+  <mc:AlternateContent xmlns:mc="http://schemas.openxmlformats.org/markup-compatibility/2006" xmlns:p15="http://schemas.microsoft.com/office/powerpoint/2012/main">
+    <mc:Choice Requires="p15">
       <p:transition spd="slow">
         <p15:prstTrans prst="pageCurlDouble" invX="1"/>
       </p:transition>
     </mc:Choice>
-    <mc:Fallback>
+    <mc:Fallback xmlns="">
       <p:transition spd="slow">
         <p:fade/>
       </p:transition>
@@ -6119,13 +6119,13 @@
   <p:clrMapOvr>
     <a:masterClrMapping/>
   </p:clrMapOvr>
-  <mc:AlternateContent xmlns:mc="http://schemas.openxmlformats.org/markup-compatibility/2006">
-    <mc:Choice xmlns:p15="http://schemas.microsoft.com/office/powerpoint/2012/main" Requires="p15">
+  <mc:AlternateContent xmlns:mc="http://schemas.openxmlformats.org/markup-compatibility/2006" xmlns:p15="http://schemas.microsoft.com/office/powerpoint/2012/main">
+    <mc:Choice Requires="p15">
       <p:transition spd="slow">
         <p15:prstTrans prst="pageCurlDouble"/>
       </p:transition>
     </mc:Choice>
-    <mc:Fallback>
+    <mc:Fallback xmlns="">
       <p:transition spd="slow">
         <p:fade/>
       </p:transition>
@@ -6191,13 +6191,13 @@
   <p:clrMapOvr>
     <a:masterClrMapping/>
   </p:clrMapOvr>
-  <mc:AlternateContent xmlns:mc="http://schemas.openxmlformats.org/markup-compatibility/2006">
-    <mc:Choice xmlns:p15="http://schemas.microsoft.com/office/powerpoint/2012/main" Requires="p15">
+  <mc:AlternateContent xmlns:mc="http://schemas.openxmlformats.org/markup-compatibility/2006" xmlns:p15="http://schemas.microsoft.com/office/powerpoint/2012/main">
+    <mc:Choice Requires="p15">
       <p:transition spd="slow">
         <p15:prstTrans prst="pageCurlDouble" invX="1"/>
       </p:transition>
     </mc:Choice>
-    <mc:Fallback>
+    <mc:Fallback xmlns="">
       <p:transition spd="slow">
         <p:fade/>
       </p:transition>
@@ -6288,13 +6288,13 @@
   <p:clrMapOvr>
     <a:masterClrMapping/>
   </p:clrMapOvr>
-  <mc:AlternateContent xmlns:mc="http://schemas.openxmlformats.org/markup-compatibility/2006">
-    <mc:Choice xmlns:p15="http://schemas.microsoft.com/office/powerpoint/2012/main" Requires="p15">
+  <mc:AlternateContent xmlns:mc="http://schemas.openxmlformats.org/markup-compatibility/2006" xmlns:p15="http://schemas.microsoft.com/office/powerpoint/2012/main">
+    <mc:Choice Requires="p15">
       <p:transition spd="slow">
         <p15:prstTrans prst="pageCurlDouble"/>
       </p:transition>
     </mc:Choice>
-    <mc:Fallback>
+    <mc:Fallback xmlns="">
       <p:transition spd="slow">
         <p:fade/>
       </p:transition>
@@ -6360,13 +6360,13 @@
   <p:clrMapOvr>
     <a:masterClrMapping/>
   </p:clrMapOvr>
-  <mc:AlternateContent xmlns:mc="http://schemas.openxmlformats.org/markup-compatibility/2006">
-    <mc:Choice xmlns:p15="http://schemas.microsoft.com/office/powerpoint/2012/main" Requires="p15">
+  <mc:AlternateContent xmlns:mc="http://schemas.openxmlformats.org/markup-compatibility/2006" xmlns:p15="http://schemas.microsoft.com/office/powerpoint/2012/main">
+    <mc:Choice Requires="p15">
       <p:transition spd="slow">
         <p15:prstTrans prst="pageCurlDouble" invX="1"/>
       </p:transition>
     </mc:Choice>
-    <mc:Fallback>
+    <mc:Fallback xmlns="">
       <p:transition spd="slow">
         <p:fade/>
       </p:transition>
@@ -6531,13 +6531,13 @@
   <p:clrMapOvr>
     <a:masterClrMapping/>
   </p:clrMapOvr>
-  <mc:AlternateContent xmlns:mc="http://schemas.openxmlformats.org/markup-compatibility/2006">
-    <mc:Choice xmlns:p15="http://schemas.microsoft.com/office/powerpoint/2012/main" Requires="p15">
+  <mc:AlternateContent xmlns:mc="http://schemas.openxmlformats.org/markup-compatibility/2006" xmlns:p15="http://schemas.microsoft.com/office/powerpoint/2012/main">
+    <mc:Choice Requires="p15">
       <p:transition spd="slow">
         <p15:prstTrans prst="pageCurlDouble"/>
       </p:transition>
     </mc:Choice>
-    <mc:Fallback>
+    <mc:Fallback xmlns="">
       <p:transition spd="slow">
         <p:fade/>
       </p:transition>
